--- a/slides/release/04-use-cases.pptx
+++ b/slides/release/04-use-cases.pptx
@@ -5,10 +5,10 @@
     <p:sldMasterId id="2147483651" r:id="rId1"/>
   </p:sldMasterIdLst>
   <p:notesMasterIdLst>
-    <p:notesMasterId r:id="rId29"/>
+    <p:notesMasterId r:id="rId31"/>
   </p:notesMasterIdLst>
   <p:handoutMasterIdLst>
-    <p:handoutMasterId r:id="rId30"/>
+    <p:handoutMasterId r:id="rId32"/>
   </p:handoutMasterIdLst>
   <p:sldIdLst>
     <p:sldId id="256" r:id="rId2"/>
@@ -38,6 +38,8 @@
     <p:sldId id="280" r:id="rId26"/>
     <p:sldId id="281" r:id="rId27"/>
     <p:sldId id="282" r:id="rId28"/>
+    <p:sldId id="283" r:id="rId29"/>
+    <p:sldId id="284" r:id="rId30"/>
   </p:sldIdLst>
   <p:sldSz cx="9372600" cy="8297863"/>
   <p:notesSz cx="7315200" cy="9601200"/>
@@ -901,7 +903,7 @@
           <a:lstStyle/>
           <a:p>
             <a:r>
-              <a:t> Basic theory-of-constraints thinking. It reframes AI value from "efficiency everywhere" to "throughput at the constraint," which is a much stronger business case.</a:t>
+              <a:t> Say the quiet part: the temptation is to prove AI on the most important, most sensitive process. That is precisely backwards. Credibility is earned on the boring processes.</a:t>
             </a:r>
           </a:p>
         </p:txBody>
@@ -971,7 +973,7 @@
           <a:lstStyle/>
           <a:p>
             <a:r>
-              <a:t> Ask for a show of hands: who has been in a project that stalled on data access? It's most of the room, and it's the same story in every organization.</a:t>
+              <a:t> This is the single most actionable slide in the module. Tell people to run it literally, next week, in a staff meeting.</a:t>
             </a:r>
           </a:p>
         </p:txBody>
@@ -1041,7 +1043,7 @@
           <a:lstStyle/>
           <a:p>
             <a:r>
-              <a:t> The "refuse" shelf is the one nobody builds and everybody needs. A documented no with a stated reason and a review date is a leadership artifact.</a:t>
+              <a:t> Basic theory-of-constraints thinking. It reframes AI value from "efficiency everywhere" to "throughput at the constraint," which is a much stronger business case.</a:t>
             </a:r>
           </a:p>
         </p:txBody>
@@ -1111,7 +1113,7 @@
           <a:lstStyle/>
           <a:p>
             <a:r>
-              <a:t> This is the bridge to Module 5 (strategy and maturity) tomorrow morning. Plant it now.</a:t>
+              <a:t> Ask for a show of hands: who has been in a project that stalled on data access? It's most of the room, and it's the same story in every organization.</a:t>
             </a:r>
           </a:p>
         </p:txBody>
@@ -1181,7 +1183,7 @@
           <a:lstStyle/>
           <a:p>
             <a:r>
-              <a:t> Ask the room which of these they have personally witnessed. The last one is the most expensive and the least discussed.</a:t>
+              <a:t> The "refuse" shelf is the one nobody builds and everybody needs. A documented no with a stated reason and a review date is a leadership artifact.</a:t>
             </a:r>
           </a:p>
         </p:txBody>
@@ -1251,7 +1253,7 @@
           <a:lstStyle/>
           <a:p>
             <a:r>
-              <a:t> These six are the challenge checklist used in the capstone tomorrow. Introduce them here so teams design against them from the start.</a:t>
+              <a:t> This is the bridge to Module 5 (strategy and maturity) tomorrow morning. Plant it now.</a:t>
             </a:r>
           </a:p>
         </p:txBody>
@@ -1321,16 +1323,7 @@
           <a:lstStyle/>
           <a:p>
             <a:r>
-              <a:t> Worksheets and scoring grid:</a:t>
-            </a:r>
-            <a:r>
-              <a:rPr>
-                <a:latin typeface="Courier New"/>
-              </a:rPr>
-              <a:t> exercises/04-use-case-portfolio.md</a:t>
-            </a:r>
-            <a:r>
-              <a:t> . Enforce the twelve — teams that stop at four have only listed what they already believed.</a:t>
+              <a:t> Ask the room which of these they have personally witnessed. The last one is the most expensive and the least discussed.</a:t>
             </a:r>
           </a:p>
         </p:txBody>
@@ -1400,7 +1393,7 @@
           <a:lstStyle/>
           <a:p>
             <a:r>
-              <a:t> The vote matters — it forces the room to apply a standard rather than being polite. Record the winners; they reappear in Exercise 8 and the capstone.</a:t>
+              <a:t> These six are the challenge checklist used in the capstone tomorrow. Introduce them here so teams design against them from the start.</a:t>
             </a:r>
           </a:p>
         </p:txBody>
@@ -1470,7 +1463,86 @@
           <a:lstStyle/>
           <a:p>
             <a:r>
-              <a:t> Go around the room. It takes ten minutes and it is worth every one of them — it consolidates the day and it tells you exactly what to adjust for Day 2.</a:t>
+              <a:t> Worksheets and scoring grid:</a:t>
+            </a:r>
+            <a:r>
+              <a:rPr>
+                <a:latin typeface="Courier New"/>
+              </a:rPr>
+              <a:t> exercises/04-use-case-portfolio.md</a:t>
+            </a:r>
+            <a:r>
+              <a:t> . Enforce the twelve — teams that stop at four have only listed what they already believed.</a:t>
+            </a:r>
+          </a:p>
+        </p:txBody>
+      </p:sp>
+    </p:spTree>
+  </p:cSld>
+  <p:clrMapOvr>
+    <a:masterClrMapping/>
+  </p:clrMapOvr>
+</p:notes>
+</file>
+
+<file path=ppt/notesSlides/notesSlide19.xml><?xml version="1.0" encoding="utf-8"?>
+<p:notes xmlns:a="http://schemas.openxmlformats.org/drawingml/2006/main" xmlns:r="http://schemas.openxmlformats.org/officeDocument/2006/relationships" xmlns:p="http://schemas.openxmlformats.org/presentationml/2006/main">
+  <p:cSld>
+    <p:spTree>
+      <p:nvGrpSpPr>
+        <p:cNvPr id="1" name=""/>
+        <p:cNvGrpSpPr/>
+        <p:nvPr/>
+      </p:nvGrpSpPr>
+      <p:grpSpPr>
+        <a:xfrm>
+          <a:off x="0" y="0"/>
+          <a:ext cx="0" cy="0"/>
+          <a:chOff x="0" y="0"/>
+          <a:chExt cx="0" cy="0"/>
+        </a:xfrm>
+      </p:grpSpPr>
+      <p:sp>
+        <p:nvSpPr>
+          <p:cNvPr id="2" name="Slide Image Placeholder 1"/>
+          <p:cNvSpPr>
+            <a:spLocks noGrp="1" noRot="1" noChangeAspect="1"/>
+          </p:cNvSpPr>
+          <p:nvPr>
+            <p:ph type="sldImg" idx="2"/>
+          </p:nvPr>
+        </p:nvSpPr>
+        <p:spPr/>
+      </p:sp>
+      <p:sp>
+        <p:nvSpPr>
+          <p:cNvPr id="3" name="Slide Number Placeholder 2"/>
+          <p:cNvSpPr>
+            <a:spLocks noGrp="1"/>
+          </p:cNvSpPr>
+          <p:nvPr>
+            <p:ph type="sldNum" sz="quarter" idx="5"/>
+          </p:nvPr>
+        </p:nvSpPr>
+        <p:spPr/>
+      </p:sp>
+      <p:sp>
+        <p:nvSpPr>
+          <p:cNvPr id="4" name="Notes Placeholder 3"/>
+          <p:cNvSpPr>
+            <a:spLocks noGrp="1"/>
+          </p:cNvSpPr>
+          <p:nvPr>
+            <p:ph type="body" sz="quarter" idx="3"/>
+          </p:nvPr>
+        </p:nvSpPr>
+        <p:spPr/>
+        <p:txBody>
+          <a:bodyPr/>
+          <a:lstStyle/>
+          <a:p>
+            <a:r>
+              <a:t> The vote matters — it forces the room to apply a standard rather than being polite. Record the winners; they reappear in Exercise 8 and the capstone.</a:t>
             </a:r>
           </a:p>
         </p:txBody>
@@ -1540,14 +1612,95 @@
           <a:lstStyle/>
           <a:p>
             <a:r>
-              <a:t> Ask which of the five the room instinctively reaches for. It is almost always cost — and cost is usually the</a:t>
+              <a:t> Built from this cohort's intro cards. The teaching point is</a:t>
+            </a:r>
+            <a:r>
+              <a:rPr b="1"/>
+              <a:t> convergence</a:t>
+            </a:r>
+            <a:r>
+              <a:t> : the room independently named the same top cluster —</a:t>
             </a:r>
             <a:r>
               <a:rPr i="1"/>
-              <a:t> smallest</a:t>
-            </a:r>
-            <a:r>
-              <a:t> of the five. Capacity is the one people miss and it is often the largest.</a:t>
+              <a:t> "check a document against the source of</a:t>
+            </a:r>
+            <a:r>
+              <a:t> — which is exactly what the grounded-assistant build lab (8b) produces and what Exercise 3 trains. Refer to people by their use case, not their name, unless they raise it themselves. Use this to make the module personal, then go straight into the five value levers and Exercise 4.</a:t>
+            </a:r>
+            <a:r>
+              <a:rPr b="1"/>
+              <a:t> Cohort-specific slide — update or delete it for a different room.</a:t>
+            </a:r>
+          </a:p>
+        </p:txBody>
+      </p:sp>
+    </p:spTree>
+  </p:cSld>
+  <p:clrMapOvr>
+    <a:masterClrMapping/>
+  </p:clrMapOvr>
+</p:notes>
+</file>
+
+<file path=ppt/notesSlides/notesSlide20.xml><?xml version="1.0" encoding="utf-8"?>
+<p:notes xmlns:a="http://schemas.openxmlformats.org/drawingml/2006/main" xmlns:r="http://schemas.openxmlformats.org/officeDocument/2006/relationships" xmlns:p="http://schemas.openxmlformats.org/presentationml/2006/main">
+  <p:cSld>
+    <p:spTree>
+      <p:nvGrpSpPr>
+        <p:cNvPr id="1" name=""/>
+        <p:cNvGrpSpPr/>
+        <p:nvPr/>
+      </p:nvGrpSpPr>
+      <p:grpSpPr>
+        <a:xfrm>
+          <a:off x="0" y="0"/>
+          <a:ext cx="0" cy="0"/>
+          <a:chOff x="0" y="0"/>
+          <a:chExt cx="0" cy="0"/>
+        </a:xfrm>
+      </p:grpSpPr>
+      <p:sp>
+        <p:nvSpPr>
+          <p:cNvPr id="2" name="Slide Image Placeholder 1"/>
+          <p:cNvSpPr>
+            <a:spLocks noGrp="1" noRot="1" noChangeAspect="1"/>
+          </p:cNvSpPr>
+          <p:nvPr>
+            <p:ph type="sldImg" idx="2"/>
+          </p:nvPr>
+        </p:nvSpPr>
+        <p:spPr/>
+      </p:sp>
+      <p:sp>
+        <p:nvSpPr>
+          <p:cNvPr id="3" name="Slide Number Placeholder 2"/>
+          <p:cNvSpPr>
+            <a:spLocks noGrp="1"/>
+          </p:cNvSpPr>
+          <p:nvPr>
+            <p:ph type="sldNum" sz="quarter" idx="5"/>
+          </p:nvPr>
+        </p:nvSpPr>
+        <p:spPr/>
+      </p:sp>
+      <p:sp>
+        <p:nvSpPr>
+          <p:cNvPr id="4" name="Notes Placeholder 3"/>
+          <p:cNvSpPr>
+            <a:spLocks noGrp="1"/>
+          </p:cNvSpPr>
+          <p:nvPr>
+            <p:ph type="body" sz="quarter" idx="3"/>
+          </p:nvPr>
+        </p:nvSpPr>
+        <p:spPr/>
+        <p:txBody>
+          <a:bodyPr/>
+          <a:lstStyle/>
+          <a:p>
+            <a:r>
+              <a:t> Go around the room. It takes ten minutes and it is worth every one of them — it consolidates the day and it tells you exactly what to adjust for Day 2.</a:t>
             </a:r>
           </a:p>
         </p:txBody>
@@ -1617,14 +1770,11 @@
           <a:lstStyle/>
           <a:p>
             <a:r>
-              <a:t> Push the room on this: what do you</a:t>
-            </a:r>
-            <a:r>
-              <a:rPr i="1"/>
-              <a:t> know</a:t>
-            </a:r>
-            <a:r>
-              <a:t> would be valuable that simply never gets done? The answers here are usually better use cases than anything on their existing list.</a:t>
+              <a:t> Road map slide — it tells this room their questions are all on the agenda, and it plants the forward references you'll cash in later (the grounded-assistant lab, the prompting rounds, the trust module). Keep it in participant language — don't read out module numbers or exercise codes. Your per-person detail for speaking to individuals is in the local answer map, not on this slide.</a:t>
+            </a:r>
+            <a:r>
+              <a:rPr b="1"/>
+              <a:t> Cohort-specific — update or delete for a different room.</a:t>
             </a:r>
           </a:p>
         </p:txBody>
@@ -1694,14 +1844,14 @@
           <a:lstStyle/>
           <a:p>
             <a:r>
-              <a:t> Walk each row and ask the room for an instance from their own work. Do not move on until every row has at least one. This slide</a:t>
+              <a:t> Ask which of the five the room instinctively reaches for. It is almost always cost — and cost is usually the</a:t>
             </a:r>
             <a:r>
               <a:rPr i="1"/>
-              <a:t> is</a:t>
-            </a:r>
-            <a:r>
-              <a:t> the idea-generation engine for Exercise 4.</a:t>
+              <a:t> smallest</a:t>
+            </a:r>
+            <a:r>
+              <a:t> of the five. Capacity is the one people miss and it is often the largest.</a:t>
             </a:r>
           </a:p>
         </p:txBody>
@@ -1771,7 +1921,14 @@
           <a:lstStyle/>
           <a:p>
             <a:r>
-              <a:t> Note the double edge: many organizations discover their real problem is document governance, not AI. That's a valuable finding, not a failure.</a:t>
+              <a:t> Push the room on this: what do you</a:t>
+            </a:r>
+            <a:r>
+              <a:rPr i="1"/>
+              <a:t> know</a:t>
+            </a:r>
+            <a:r>
+              <a:t> would be valuable that simply never gets done? The answers here are usually better use cases than anything on their existing list.</a:t>
             </a:r>
           </a:p>
         </p:txBody>
@@ -1841,7 +1998,14 @@
           <a:lstStyle/>
           <a:p>
             <a:r>
-              <a:t> If a team needs a win in 90 days to keep funding, this row is the answer. Say so explicitly.</a:t>
+              <a:t> Walk each row and ask the room for an instance from their own work. Do not move on until every row has at least one. This slide</a:t>
+            </a:r>
+            <a:r>
+              <a:rPr i="1"/>
+              <a:t> is</a:t>
+            </a:r>
+            <a:r>
+              <a:t> the idea-generation engine for Exercise 4.</a:t>
             </a:r>
           </a:p>
         </p:txBody>
@@ -1911,11 +2075,7 @@
           <a:lstStyle/>
           <a:p>
             <a:r>
-              <a:t> For regulated and safety-critical audiences this framing is the difference between a usable idea and a non-starter. Emphasize it hard:</a:t>
-            </a:r>
-            <a:r>
-              <a:rPr i="1"/>
-              <a:t> attention direction, not approval.</a:t>
+              <a:t> Note the double edge: many organizations discover their real problem is document governance, not AI. That's a valuable finding, not a failure.</a:t>
             </a:r>
           </a:p>
         </p:txBody>
@@ -1985,7 +2145,7 @@
           <a:lstStyle/>
           <a:p>
             <a:r>
-              <a:t> Say the quiet part: the temptation is to prove AI on the most important, most sensitive process. That is precisely backwards. Credibility is earned on the boring processes.</a:t>
+              <a:t> If a team needs a win in 90 days to keep funding, this row is the answer. Say so explicitly.</a:t>
             </a:r>
           </a:p>
         </p:txBody>
@@ -2055,7 +2215,11 @@
           <a:lstStyle/>
           <a:p>
             <a:r>
-              <a:t> This is the single most actionable slide in the module. Tell people to run it literally, next week, in a staff meeting.</a:t>
+              <a:t> For regulated and safety-critical audiences this framing is the difference between a usable idea and a non-starter. Emphasize it hard:</a:t>
+            </a:r>
+            <a:r>
+              <a:rPr i="1"/>
+              <a:t> attention direction, not approval.</a:t>
             </a:r>
           </a:p>
         </p:txBody>
@@ -3723,12 +3887,12 @@
       </p:grpSpPr>
       <p:sp>
         <p:nvSpPr>
-          <p:cNvPr id="2" name="Subtitle 1"/>
-          <p:cNvSpPr>
-            <a:spLocks noGrp="1"/>
-          </p:cNvSpPr>
-          <p:nvPr>
-            <p:ph type="subTitle" sz="quarter" idx="1"/>
+          <p:cNvPr id="2" name="Title 1"/>
+          <p:cNvSpPr>
+            <a:spLocks noGrp="1"/>
+          </p:cNvSpPr>
+          <p:nvPr>
+            <p:ph type="title"/>
           </p:nvPr>
         </p:nvSpPr>
         <p:spPr/>
@@ -3736,45 +3900,66 @@
           <a:bodyPr/>
           <a:lstStyle/>
           <a:p>
-            <a:pPr>
-              <a:defRPr sz="3200"/>
-            </a:pPr>
+            <a:r>
+              <a:t>Quality and Consistency Review</a:t>
+            </a:r>
+          </a:p>
+        </p:txBody>
+      </p:sp>
+      <p:sp>
+        <p:nvSpPr>
+          <p:cNvPr id="3" name="Content Placeholder 2"/>
+          <p:cNvSpPr>
+            <a:spLocks noGrp="1"/>
+          </p:cNvSpPr>
+          <p:nvPr>
+            <p:ph idx="1"/>
+          </p:nvPr>
+        </p:nvSpPr>
+        <p:spPr/>
+        <p:txBody>
+          <a:bodyPr/>
+          <a:lstStyle/>
+          <a:p>
+            <a:r>
+              <a:rPr i="1"/>
+              <a:t> "Check this document against that standard and tell me every place it deviates."</a:t>
+            </a:r>
+          </a:p>
+          <a:p>
+            <a:r>
+              <a:t> A submission against a template or checklist</a:t>
+            </a:r>
+          </a:p>
+          <a:p>
+            <a:r>
+              <a:t> This revision against the previous one — what actually changed and does it matter</a:t>
+            </a:r>
+          </a:p>
+          <a:p>
+            <a:r>
+              <a:t> A set of procedures against each other — where do they contradict?</a:t>
+            </a:r>
+          </a:p>
+          <a:p>
+            <a:r>
+              <a:t> A report against the data it cites</a:t>
+            </a:r>
+          </a:p>
+          <a:p>
             <a:r>
               <a:rPr b="1"/>
-              <a:t>Finding Candidates
-</a:t>
-            </a:r>
-            <a:r>
-              <a:t>Choosing Among Them
-Exercise 4 — The Use-Case Portfolio
-End of Day 1
-</a:t>
-            </a:r>
-          </a:p>
-        </p:txBody>
-      </p:sp>
-      <p:sp>
-        <p:nvSpPr>
-          <p:cNvPr id="3" name="Title 2"/>
-          <p:cNvSpPr>
-            <a:spLocks noGrp="1"/>
-          </p:cNvSpPr>
-          <p:nvPr>
-            <p:ph type="ctrTitle" sz="quarter"/>
-          </p:nvPr>
-        </p:nvSpPr>
-        <p:spPr/>
-        <p:txBody>
-          <a:bodyPr wrap="square">
-            <a:noAutofit/>
-          </a:bodyPr>
-          <a:lstStyle/>
-          <a:p>
-            <a:r>
-              <a:rPr sz="4200" b="1" i="0">
-                <a:latin typeface="Times New Roman"/>
-              </a:rPr>
-              <a:t>Finding Candidates</a:t>
+              <a:t> The framing that makes this safe:</a:t>
+            </a:r>
+            <a:r>
+              <a:t> AI does not approve anything. AI produces a</a:t>
+            </a:r>
+            <a:r>
+              <a:rPr b="1"/>
+              <a:t> list of things for a qualified person to look at.</a:t>
+            </a:r>
+            <a:r>
+              <a:t> It changes where the human's attention goes; it does not replace the human.</a:t>
             </a:r>
           </a:p>
         </p:txBody>
@@ -3853,7 +4038,7 @@
           <a:lstStyle/>
           <a:p>
             <a:r>
-              <a:t>Technique 1 — The Friction Audit</a:t>
+              <a:t>Use Cases in Regulated and Safety-Critical Environments</a:t>
             </a:r>
           </a:p>
         </p:txBody>
@@ -3874,65 +4059,72 @@
           <a:lstStyle/>
           <a:p>
             <a:r>
-              <a:rPr dirty="0"/>
-              <a:t> Ask your people one question:</a:t>
-            </a:r>
-          </a:p>
-          <a:p>
-            <a:endParaRPr lang="en-US" dirty="0"/>
-          </a:p>
-          <a:p>
-            <a:endParaRPr lang="en-US" dirty="0"/>
-          </a:p>
-          <a:p>
-            <a:endParaRPr dirty="0"/>
-          </a:p>
-          <a:p>
-            <a:r>
-              <a:rPr dirty="0"/>
-              <a:t> Then listen for these words:</a:t>
-            </a:r>
-          </a:p>
-          <a:p>
-            <a:r>
-              <a:rPr i="1" dirty="0"/>
-              <a:t> "I copy it from here into there"</a:t>
-            </a:r>
-          </a:p>
-          <a:p>
-            <a:r>
-              <a:rPr i="1" dirty="0"/>
-              <a:t> "I have to read all of them to find the few that matter"</a:t>
-            </a:r>
-          </a:p>
-          <a:p>
-            <a:r>
-              <a:rPr i="1" dirty="0"/>
-              <a:t> "I reformat it for each audience"</a:t>
-            </a:r>
-          </a:p>
-          <a:p>
-            <a:r>
-              <a:rPr i="1" dirty="0"/>
-              <a:t> "I check every one against the standard"</a:t>
-            </a:r>
-          </a:p>
-          <a:p>
-            <a:r>
-              <a:rPr i="1" dirty="0"/>
-              <a:t> "It's always the same seven questions"</a:t>
-            </a:r>
-          </a:p>
-          <a:p>
-            <a:r>
-              <a:rPr i="1" dirty="0"/>
-              <a:t> "I'd do it if I had time"</a:t>
-            </a:r>
-          </a:p>
-          <a:p>
-            <a:r>
-              <a:rPr dirty="0"/>
-              <a:t> Every one of those is an AI-shaped problem, described by the person who owns it.</a:t>
+              <a:rPr b="1"/>
+              <a:t> What doesn't change:</a:t>
+            </a:r>
+            <a:r>
+              <a:t> the technology, the patterns, the prompting, the economics.</a:t>
+            </a:r>
+          </a:p>
+          <a:p>
+            <a:r>
+              <a:rPr b="1"/>
+              <a:t> What does change:</a:t>
+            </a:r>
+          </a:p>
+          <a:p>
+            <a:r>
+              <a:t> The</a:t>
+            </a:r>
+            <a:r>
+              <a:rPr b="1"/>
+              <a:t> evidence burden</a:t>
+            </a:r>
+            <a:r>
+              <a:t> — you must be able to show how a result was produced</a:t>
+            </a:r>
+          </a:p>
+          <a:p>
+            <a:r>
+              <a:rPr b="1"/>
+              <a:t> Data boundaries</a:t>
+            </a:r>
+            <a:r>
+              <a:t> — what may go where is decided before the use case is</a:t>
+            </a:r>
+          </a:p>
+          <a:p>
+            <a:r>
+              <a:rPr b="1"/>
+              <a:t> Approval paths</a:t>
+            </a:r>
+            <a:r>
+              <a:t> — proportional to consequence, and already defined</a:t>
+            </a:r>
+          </a:p>
+          <a:p>
+            <a:r>
+              <a:rPr b="1"/>
+              <a:t> The irreversible zone</a:t>
+            </a:r>
+            <a:r>
+              <a:t> — some outputs simply do not get generated by a machine</a:t>
+            </a:r>
+          </a:p>
+          <a:p>
+            <a:r>
+              <a:rPr b="1"/>
+              <a:t> The practical consequence:</a:t>
+            </a:r>
+            <a:r>
+              <a:t> start where the work is</a:t>
+            </a:r>
+            <a:r>
+              <a:rPr i="1"/>
+              <a:t> high-volume, internal, and</a:t>
+            </a:r>
+            <a:r>
+              <a:t> . Build the track record there. Do not open with the hardest case.</a:t>
             </a:r>
           </a:p>
         </p:txBody>
@@ -3970,6 +4162,277 @@
           </a:p>
         </p:txBody>
       </p:sp>
+    </p:spTree>
+  </p:cSld>
+  <p:clrMapOvr>
+    <a:masterClrMapping/>
+  </p:clrMapOvr>
+</p:sld>
+</file>
+
+<file path=ppt/slides/slide12.xml><?xml version="1.0" encoding="utf-8"?>
+<p:sld xmlns:a="http://schemas.openxmlformats.org/drawingml/2006/main" xmlns:r="http://schemas.openxmlformats.org/officeDocument/2006/relationships" xmlns:p="http://schemas.openxmlformats.org/presentationml/2006/main">
+  <p:cSld>
+    <p:spTree>
+      <p:nvGrpSpPr>
+        <p:cNvPr id="1" name=""/>
+        <p:cNvGrpSpPr/>
+        <p:nvPr/>
+      </p:nvGrpSpPr>
+      <p:grpSpPr>
+        <a:xfrm>
+          <a:off x="0" y="0"/>
+          <a:ext cx="0" cy="0"/>
+          <a:chOff x="0" y="0"/>
+          <a:chExt cx="0" cy="0"/>
+        </a:xfrm>
+      </p:grpSpPr>
+      <p:sp>
+        <p:nvSpPr>
+          <p:cNvPr id="2" name="Subtitle 1"/>
+          <p:cNvSpPr>
+            <a:spLocks noGrp="1"/>
+          </p:cNvSpPr>
+          <p:nvPr>
+            <p:ph type="subTitle" sz="quarter" idx="1"/>
+          </p:nvPr>
+        </p:nvSpPr>
+        <p:spPr/>
+        <p:txBody>
+          <a:bodyPr/>
+          <a:lstStyle/>
+          <a:p>
+            <a:pPr>
+              <a:defRPr sz="3200"/>
+            </a:pPr>
+            <a:r>
+              <a:rPr b="1"/>
+              <a:t>Finding Candidates
+</a:t>
+            </a:r>
+            <a:r>
+              <a:t>Choosing Among Them
+Exercise 4 — The Use-Case Portfolio
+End of Day 1
+</a:t>
+            </a:r>
+          </a:p>
+        </p:txBody>
+      </p:sp>
+      <p:sp>
+        <p:nvSpPr>
+          <p:cNvPr id="3" name="Title 2"/>
+          <p:cNvSpPr>
+            <a:spLocks noGrp="1"/>
+          </p:cNvSpPr>
+          <p:nvPr>
+            <p:ph type="ctrTitle" sz="quarter"/>
+          </p:nvPr>
+        </p:nvSpPr>
+        <p:spPr/>
+        <p:txBody>
+          <a:bodyPr wrap="square">
+            <a:noAutofit/>
+          </a:bodyPr>
+          <a:lstStyle/>
+          <a:p>
+            <a:r>
+              <a:rPr sz="4200" b="1" i="0">
+                <a:latin typeface="Times New Roman"/>
+              </a:rPr>
+              <a:t>Finding Candidates</a:t>
+            </a:r>
+          </a:p>
+        </p:txBody>
+      </p:sp>
+      <p:sp>
+        <p:nvSpPr>
+          <p:cNvPr id="4" name="TextBox 3"/>
+          <p:cNvSpPr txBox="1"/>
+          <p:nvPr/>
+        </p:nvSpPr>
+        <p:spPr>
+          <a:xfrm>
+            <a:off x="704088" y="8065008"/>
+            <a:ext cx="8915400" cy="228600"/>
+          </a:xfrm>
+          <a:prstGeom prst="rect">
+            <a:avLst/>
+          </a:prstGeom>
+          <a:noFill/>
+        </p:spPr>
+        <p:txBody>
+          <a:bodyPr wrap="none">
+            <a:spAutoFit/>
+          </a:bodyPr>
+          <a:lstStyle/>
+          <a:p>
+            <a:r>
+              <a:rPr sz="800">
+                <a:solidFill>
+                  <a:srgbClr val="000000"/>
+                </a:solidFill>
+              </a:rPr>
+              <a:t>Copyright © 2026 by Elephant Scale, All Rights Reserved</a:t>
+            </a:r>
+          </a:p>
+        </p:txBody>
+      </p:sp>
+    </p:spTree>
+  </p:cSld>
+  <p:clrMapOvr>
+    <a:masterClrMapping/>
+  </p:clrMapOvr>
+</p:sld>
+</file>
+
+<file path=ppt/slides/slide13.xml><?xml version="1.0" encoding="utf-8"?>
+<p:sld xmlns:a="http://schemas.openxmlformats.org/drawingml/2006/main" xmlns:r="http://schemas.openxmlformats.org/officeDocument/2006/relationships" xmlns:p="http://schemas.openxmlformats.org/presentationml/2006/main">
+  <p:cSld>
+    <p:spTree>
+      <p:nvGrpSpPr>
+        <p:cNvPr id="1" name=""/>
+        <p:cNvGrpSpPr/>
+        <p:nvPr/>
+      </p:nvGrpSpPr>
+      <p:grpSpPr>
+        <a:xfrm>
+          <a:off x="0" y="0"/>
+          <a:ext cx="0" cy="0"/>
+          <a:chOff x="0" y="0"/>
+          <a:chExt cx="0" cy="0"/>
+        </a:xfrm>
+      </p:grpSpPr>
+      <p:sp>
+        <p:nvSpPr>
+          <p:cNvPr id="2" name="Title 1"/>
+          <p:cNvSpPr>
+            <a:spLocks noGrp="1"/>
+          </p:cNvSpPr>
+          <p:nvPr>
+            <p:ph type="title"/>
+          </p:nvPr>
+        </p:nvSpPr>
+        <p:spPr/>
+        <p:txBody>
+          <a:bodyPr/>
+          <a:lstStyle/>
+          <a:p>
+            <a:r>
+              <a:t>Technique 1 — The Friction Audit</a:t>
+            </a:r>
+          </a:p>
+        </p:txBody>
+      </p:sp>
+      <p:sp>
+        <p:nvSpPr>
+          <p:cNvPr id="3" name="Content Placeholder 2"/>
+          <p:cNvSpPr>
+            <a:spLocks noGrp="1"/>
+          </p:cNvSpPr>
+          <p:nvPr>
+            <p:ph idx="1"/>
+          </p:nvPr>
+        </p:nvSpPr>
+        <p:spPr/>
+        <p:txBody>
+          <a:bodyPr/>
+          <a:lstStyle/>
+          <a:p>
+            <a:r>
+              <a:rPr dirty="0"/>
+              <a:t> Ask your people one question:</a:t>
+            </a:r>
+          </a:p>
+          <a:p>
+            <a:endParaRPr lang="en-US" dirty="0"/>
+          </a:p>
+          <a:p>
+            <a:endParaRPr dirty="0"/>
+          </a:p>
+          <a:p>
+            <a:r>
+              <a:rPr dirty="0"/>
+              <a:t> Then listen for these words:</a:t>
+            </a:r>
+          </a:p>
+          <a:p>
+            <a:r>
+              <a:rPr i="1" dirty="0"/>
+              <a:t> "I copy it from here into there"</a:t>
+            </a:r>
+          </a:p>
+          <a:p>
+            <a:r>
+              <a:rPr i="1" dirty="0"/>
+              <a:t> "I have to read all of them to find the few that matter"</a:t>
+            </a:r>
+          </a:p>
+          <a:p>
+            <a:r>
+              <a:rPr i="1" dirty="0"/>
+              <a:t> "I reformat it for each audience"</a:t>
+            </a:r>
+          </a:p>
+          <a:p>
+            <a:r>
+              <a:rPr i="1" dirty="0"/>
+              <a:t> "I check every one against the standard"</a:t>
+            </a:r>
+          </a:p>
+          <a:p>
+            <a:r>
+              <a:rPr i="1" dirty="0"/>
+              <a:t> "It's always the same seven questions"</a:t>
+            </a:r>
+          </a:p>
+          <a:p>
+            <a:r>
+              <a:rPr i="1" dirty="0"/>
+              <a:t> "I'd do it if I had time"</a:t>
+            </a:r>
+          </a:p>
+          <a:p>
+            <a:r>
+              <a:rPr dirty="0"/>
+              <a:t> Every one of those is an AI-shaped problem, described by the person who owns it.</a:t>
+            </a:r>
+          </a:p>
+        </p:txBody>
+      </p:sp>
+      <p:sp>
+        <p:nvSpPr>
+          <p:cNvPr id="4" name="TextBox 3"/>
+          <p:cNvSpPr txBox="1"/>
+          <p:nvPr/>
+        </p:nvSpPr>
+        <p:spPr>
+          <a:xfrm>
+            <a:off x="704088" y="8065008"/>
+            <a:ext cx="8915400" cy="228600"/>
+          </a:xfrm>
+          <a:prstGeom prst="rect">
+            <a:avLst/>
+          </a:prstGeom>
+          <a:noFill/>
+        </p:spPr>
+        <p:txBody>
+          <a:bodyPr wrap="none">
+            <a:spAutoFit/>
+          </a:bodyPr>
+          <a:lstStyle/>
+          <a:p>
+            <a:r>
+              <a:rPr sz="800">
+                <a:solidFill>
+                  <a:srgbClr val="000000"/>
+                </a:solidFill>
+              </a:rPr>
+              <a:t>Copyright © 2026 by Elephant Scale, All Rights Reserved</a:t>
+            </a:r>
+          </a:p>
+        </p:txBody>
+      </p:sp>
       <p:sp>
         <p:nvSpPr>
           <p:cNvPr id="5" name="Rectangle 4"/>
@@ -3978,7 +4441,7 @@
         </p:nvSpPr>
         <p:spPr>
           <a:xfrm>
-            <a:off x="419100" y="1634331"/>
+            <a:off x="419100" y="1558131"/>
             <a:ext cx="7507224" cy="566928"/>
           </a:xfrm>
           <a:prstGeom prst="rect">
@@ -4031,259 +4494,6 @@
 </p:sld>
 </file>
 
-<file path=ppt/slides/slide12.xml><?xml version="1.0" encoding="utf-8"?>
-<p:sld xmlns:a="http://schemas.openxmlformats.org/drawingml/2006/main" xmlns:r="http://schemas.openxmlformats.org/officeDocument/2006/relationships" xmlns:p="http://schemas.openxmlformats.org/presentationml/2006/main">
-  <p:cSld>
-    <p:spTree>
-      <p:nvGrpSpPr>
-        <p:cNvPr id="1" name=""/>
-        <p:cNvGrpSpPr/>
-        <p:nvPr/>
-      </p:nvGrpSpPr>
-      <p:grpSpPr>
-        <a:xfrm>
-          <a:off x="0" y="0"/>
-          <a:ext cx="0" cy="0"/>
-          <a:chOff x="0" y="0"/>
-          <a:chExt cx="0" cy="0"/>
-        </a:xfrm>
-      </p:grpSpPr>
-      <p:sp>
-        <p:nvSpPr>
-          <p:cNvPr id="2" name="Title 1"/>
-          <p:cNvSpPr>
-            <a:spLocks noGrp="1"/>
-          </p:cNvSpPr>
-          <p:nvPr>
-            <p:ph type="title"/>
-          </p:nvPr>
-        </p:nvSpPr>
-        <p:spPr/>
-        <p:txBody>
-          <a:bodyPr/>
-          <a:lstStyle/>
-          <a:p>
-            <a:r>
-              <a:t>Technique 2 — Follow the Retyping</a:t>
-            </a:r>
-          </a:p>
-        </p:txBody>
-      </p:sp>
-      <p:sp>
-        <p:nvSpPr>
-          <p:cNvPr id="3" name="Content Placeholder 2"/>
-          <p:cNvSpPr>
-            <a:spLocks noGrp="1"/>
-          </p:cNvSpPr>
-          <p:nvPr>
-            <p:ph idx="1"/>
-          </p:nvPr>
-        </p:nvSpPr>
-        <p:spPr/>
-        <p:txBody>
-          <a:bodyPr/>
-          <a:lstStyle/>
-          <a:p>
-            <a:r>
-              <a:t> Wherever information is</a:t>
-            </a:r>
-            <a:r>
-              <a:rPr b="1"/>
-              <a:t> re-entered by hand</a:t>
-            </a:r>
-            <a:r>
-              <a:t> , value is leaking.</a:t>
-            </a:r>
-          </a:p>
-          <a:p>
-            <a:r>
-              <a:t> A PDF becomes a spreadsheet becomes a report becomes a slide</a:t>
-            </a:r>
-          </a:p>
-          <a:p>
-            <a:r>
-              <a:t> The same facts entered into three systems</a:t>
-            </a:r>
-          </a:p>
-          <a:p>
-            <a:r>
-              <a:t> A form filled out from a document someone already has</a:t>
-            </a:r>
-          </a:p>
-          <a:p>
-            <a:r>
-              <a:rPr b="1"/>
-              <a:t> Why this test works:</a:t>
-            </a:r>
-            <a:r>
-              <a:t> retyping means the information is already written down but not in a usable form. That is exactly the gap this technology closes.</a:t>
-            </a:r>
-          </a:p>
-        </p:txBody>
-      </p:sp>
-      <p:sp>
-        <p:nvSpPr>
-          <p:cNvPr id="4" name="TextBox 3"/>
-          <p:cNvSpPr txBox="1"/>
-          <p:nvPr/>
-        </p:nvSpPr>
-        <p:spPr>
-          <a:xfrm>
-            <a:off x="704088" y="8065008"/>
-            <a:ext cx="8915400" cy="228600"/>
-          </a:xfrm>
-          <a:prstGeom prst="rect">
-            <a:avLst/>
-          </a:prstGeom>
-          <a:noFill/>
-        </p:spPr>
-        <p:txBody>
-          <a:bodyPr wrap="none">
-            <a:spAutoFit/>
-          </a:bodyPr>
-          <a:lstStyle/>
-          <a:p>
-            <a:r>
-              <a:rPr sz="800">
-                <a:solidFill>
-                  <a:srgbClr val="000000"/>
-                </a:solidFill>
-              </a:rPr>
-              <a:t>Copyright © 2026 by Elephant Scale, All Rights Reserved</a:t>
-            </a:r>
-          </a:p>
-        </p:txBody>
-      </p:sp>
-    </p:spTree>
-  </p:cSld>
-  <p:clrMapOvr>
-    <a:masterClrMapping/>
-  </p:clrMapOvr>
-</p:sld>
-</file>
-
-<file path=ppt/slides/slide13.xml><?xml version="1.0" encoding="utf-8"?>
-<p:sld xmlns:a="http://schemas.openxmlformats.org/drawingml/2006/main" xmlns:r="http://schemas.openxmlformats.org/officeDocument/2006/relationships" xmlns:p="http://schemas.openxmlformats.org/presentationml/2006/main">
-  <p:cSld>
-    <p:spTree>
-      <p:nvGrpSpPr>
-        <p:cNvPr id="1" name=""/>
-        <p:cNvGrpSpPr/>
-        <p:nvPr/>
-      </p:nvGrpSpPr>
-      <p:grpSpPr>
-        <a:xfrm>
-          <a:off x="0" y="0"/>
-          <a:ext cx="0" cy="0"/>
-          <a:chOff x="0" y="0"/>
-          <a:chExt cx="0" cy="0"/>
-        </a:xfrm>
-      </p:grpSpPr>
-      <p:sp>
-        <p:nvSpPr>
-          <p:cNvPr id="2" name="Title 1"/>
-          <p:cNvSpPr>
-            <a:spLocks noGrp="1"/>
-          </p:cNvSpPr>
-          <p:nvPr>
-            <p:ph type="title"/>
-          </p:nvPr>
-        </p:nvSpPr>
-        <p:spPr/>
-        <p:txBody>
-          <a:bodyPr/>
-          <a:lstStyle/>
-          <a:p>
-            <a:r>
-              <a:t>Technique 3 — Find the Queue and the Bottleneck</a:t>
-            </a:r>
-          </a:p>
-        </p:txBody>
-      </p:sp>
-      <p:sp>
-        <p:nvSpPr>
-          <p:cNvPr id="3" name="Content Placeholder 2"/>
-          <p:cNvSpPr>
-            <a:spLocks noGrp="1"/>
-          </p:cNvSpPr>
-          <p:nvPr>
-            <p:ph idx="1"/>
-          </p:nvPr>
-        </p:nvSpPr>
-        <p:spPr/>
-        <p:txBody>
-          <a:bodyPr/>
-          <a:lstStyle/>
-          <a:p>
-            <a:r>
-              <a:t> Where does work</a:t>
-            </a:r>
-            <a:r>
-              <a:rPr b="1"/>
-              <a:t> pile up</a:t>
-            </a:r>
-            <a:r>
-              <a:t> waiting for one specific person?</a:t>
-            </a:r>
-          </a:p>
-          <a:p>
-            <a:r>
-              <a:t> Which review step has a two-week turnaround?</a:t>
-            </a:r>
-          </a:p>
-          <a:p>
-            <a:r>
-              <a:t> What is "on the list" and has been for three years?</a:t>
-            </a:r>
-          </a:p>
-          <a:p>
-            <a:r>
-              <a:t> Speed and capacity gains at a bottleneck are worth more than efficiency gains anywhere else. Everywhere else, saving an hour just creates slack.</a:t>
-            </a:r>
-          </a:p>
-        </p:txBody>
-      </p:sp>
-      <p:sp>
-        <p:nvSpPr>
-          <p:cNvPr id="4" name="TextBox 3"/>
-          <p:cNvSpPr txBox="1"/>
-          <p:nvPr/>
-        </p:nvSpPr>
-        <p:spPr>
-          <a:xfrm>
-            <a:off x="704088" y="8065008"/>
-            <a:ext cx="8915400" cy="228600"/>
-          </a:xfrm>
-          <a:prstGeom prst="rect">
-            <a:avLst/>
-          </a:prstGeom>
-          <a:noFill/>
-        </p:spPr>
-        <p:txBody>
-          <a:bodyPr wrap="none">
-            <a:spAutoFit/>
-          </a:bodyPr>
-          <a:lstStyle/>
-          <a:p>
-            <a:r>
-              <a:rPr sz="800">
-                <a:solidFill>
-                  <a:srgbClr val="000000"/>
-                </a:solidFill>
-              </a:rPr>
-              <a:t>Copyright © 2026 by Elephant Scale, All Rights Reserved</a:t>
-            </a:r>
-          </a:p>
-        </p:txBody>
-      </p:sp>
-    </p:spTree>
-  </p:cSld>
-  <p:clrMapOvr>
-    <a:masterClrMapping/>
-  </p:clrMapOvr>
-</p:sld>
-</file>
-
 <file path=ppt/slides/slide14.xml><?xml version="1.0" encoding="utf-8"?>
 <p:sld xmlns:a="http://schemas.openxmlformats.org/drawingml/2006/main" xmlns:r="http://schemas.openxmlformats.org/officeDocument/2006/relationships" xmlns:p="http://schemas.openxmlformats.org/presentationml/2006/main">
   <p:cSld>
@@ -4317,7 +4527,7 @@
           <a:lstStyle/>
           <a:p>
             <a:r>
-              <a:t>Technique 4 — Revisit Your "No" List</a:t>
+              <a:t>Technique 2 — Follow the Retyping</a:t>
             </a:r>
           </a:p>
         </p:txBody>
@@ -4338,16 +4548,39 @@
           <a:lstStyle/>
           <a:p>
             <a:r>
-              <a:t> What did you decline in the last three years because it was too expensive, too slow, or needed a data science team?</a:t>
-            </a:r>
-          </a:p>
-          <a:p>
-            <a:r>
-              <a:t> Prices have fallen by orders of magnitude. Capability has risen. Some of those decisions were correct then and are wrong now.</a:t>
-            </a:r>
-          </a:p>
-          <a:p>
-            <a:endParaRPr/>
+              <a:t> Wherever information is</a:t>
+            </a:r>
+            <a:r>
+              <a:rPr b="1"/>
+              <a:t> re-entered by hand</a:t>
+            </a:r>
+            <a:r>
+              <a:t> , value is leaking.</a:t>
+            </a:r>
+          </a:p>
+          <a:p>
+            <a:r>
+              <a:t> A PDF becomes a spreadsheet becomes a report becomes a slide</a:t>
+            </a:r>
+          </a:p>
+          <a:p>
+            <a:r>
+              <a:t> The same facts entered into three systems</a:t>
+            </a:r>
+          </a:p>
+          <a:p>
+            <a:r>
+              <a:t> A form filled out from a document someone already has</a:t>
+            </a:r>
+          </a:p>
+          <a:p>
+            <a:r>
+              <a:rPr b="1"/>
+              <a:t> Why this test works:</a:t>
+            </a:r>
+            <a:r>
+              <a:t> retyping means the information is already written down but not in a usable form. That is exactly the gap this technology closes.</a:t>
+            </a:r>
           </a:p>
         </p:txBody>
       </p:sp>
@@ -4384,6 +4617,236 @@
           </a:p>
         </p:txBody>
       </p:sp>
+    </p:spTree>
+  </p:cSld>
+  <p:clrMapOvr>
+    <a:masterClrMapping/>
+  </p:clrMapOvr>
+</p:sld>
+</file>
+
+<file path=ppt/slides/slide15.xml><?xml version="1.0" encoding="utf-8"?>
+<p:sld xmlns:a="http://schemas.openxmlformats.org/drawingml/2006/main" xmlns:r="http://schemas.openxmlformats.org/officeDocument/2006/relationships" xmlns:p="http://schemas.openxmlformats.org/presentationml/2006/main">
+  <p:cSld>
+    <p:spTree>
+      <p:nvGrpSpPr>
+        <p:cNvPr id="1" name=""/>
+        <p:cNvGrpSpPr/>
+        <p:nvPr/>
+      </p:nvGrpSpPr>
+      <p:grpSpPr>
+        <a:xfrm>
+          <a:off x="0" y="0"/>
+          <a:ext cx="0" cy="0"/>
+          <a:chOff x="0" y="0"/>
+          <a:chExt cx="0" cy="0"/>
+        </a:xfrm>
+      </p:grpSpPr>
+      <p:sp>
+        <p:nvSpPr>
+          <p:cNvPr id="2" name="Title 1"/>
+          <p:cNvSpPr>
+            <a:spLocks noGrp="1"/>
+          </p:cNvSpPr>
+          <p:nvPr>
+            <p:ph type="title"/>
+          </p:nvPr>
+        </p:nvSpPr>
+        <p:spPr/>
+        <p:txBody>
+          <a:bodyPr/>
+          <a:lstStyle/>
+          <a:p>
+            <a:r>
+              <a:t>Technique 3 — Find the Queue and the Bottleneck</a:t>
+            </a:r>
+          </a:p>
+        </p:txBody>
+      </p:sp>
+      <p:sp>
+        <p:nvSpPr>
+          <p:cNvPr id="3" name="Content Placeholder 2"/>
+          <p:cNvSpPr>
+            <a:spLocks noGrp="1"/>
+          </p:cNvSpPr>
+          <p:nvPr>
+            <p:ph idx="1"/>
+          </p:nvPr>
+        </p:nvSpPr>
+        <p:spPr/>
+        <p:txBody>
+          <a:bodyPr/>
+          <a:lstStyle/>
+          <a:p>
+            <a:r>
+              <a:t> Where does work</a:t>
+            </a:r>
+            <a:r>
+              <a:rPr b="1"/>
+              <a:t> pile up</a:t>
+            </a:r>
+            <a:r>
+              <a:t> waiting for one specific person?</a:t>
+            </a:r>
+          </a:p>
+          <a:p>
+            <a:r>
+              <a:t> Which review step has a two-week turnaround?</a:t>
+            </a:r>
+          </a:p>
+          <a:p>
+            <a:r>
+              <a:t> What is "on the list" and has been for three years?</a:t>
+            </a:r>
+          </a:p>
+          <a:p>
+            <a:r>
+              <a:t> Speed and capacity gains at a bottleneck are worth more than efficiency gains anywhere else. Everywhere else, saving an hour just creates slack.</a:t>
+            </a:r>
+          </a:p>
+        </p:txBody>
+      </p:sp>
+      <p:sp>
+        <p:nvSpPr>
+          <p:cNvPr id="4" name="TextBox 3"/>
+          <p:cNvSpPr txBox="1"/>
+          <p:nvPr/>
+        </p:nvSpPr>
+        <p:spPr>
+          <a:xfrm>
+            <a:off x="704088" y="8065008"/>
+            <a:ext cx="8915400" cy="228600"/>
+          </a:xfrm>
+          <a:prstGeom prst="rect">
+            <a:avLst/>
+          </a:prstGeom>
+          <a:noFill/>
+        </p:spPr>
+        <p:txBody>
+          <a:bodyPr wrap="none">
+            <a:spAutoFit/>
+          </a:bodyPr>
+          <a:lstStyle/>
+          <a:p>
+            <a:r>
+              <a:rPr sz="800">
+                <a:solidFill>
+                  <a:srgbClr val="000000"/>
+                </a:solidFill>
+              </a:rPr>
+              <a:t>Copyright © 2026 by Elephant Scale, All Rights Reserved</a:t>
+            </a:r>
+          </a:p>
+        </p:txBody>
+      </p:sp>
+    </p:spTree>
+  </p:cSld>
+  <p:clrMapOvr>
+    <a:masterClrMapping/>
+  </p:clrMapOvr>
+</p:sld>
+</file>
+
+<file path=ppt/slides/slide16.xml><?xml version="1.0" encoding="utf-8"?>
+<p:sld xmlns:a="http://schemas.openxmlformats.org/drawingml/2006/main" xmlns:r="http://schemas.openxmlformats.org/officeDocument/2006/relationships" xmlns:p="http://schemas.openxmlformats.org/presentationml/2006/main">
+  <p:cSld>
+    <p:spTree>
+      <p:nvGrpSpPr>
+        <p:cNvPr id="1" name=""/>
+        <p:cNvGrpSpPr/>
+        <p:nvPr/>
+      </p:nvGrpSpPr>
+      <p:grpSpPr>
+        <a:xfrm>
+          <a:off x="0" y="0"/>
+          <a:ext cx="0" cy="0"/>
+          <a:chOff x="0" y="0"/>
+          <a:chExt cx="0" cy="0"/>
+        </a:xfrm>
+      </p:grpSpPr>
+      <p:sp>
+        <p:nvSpPr>
+          <p:cNvPr id="2" name="Title 1"/>
+          <p:cNvSpPr>
+            <a:spLocks noGrp="1"/>
+          </p:cNvSpPr>
+          <p:nvPr>
+            <p:ph type="title"/>
+          </p:nvPr>
+        </p:nvSpPr>
+        <p:spPr/>
+        <p:txBody>
+          <a:bodyPr/>
+          <a:lstStyle/>
+          <a:p>
+            <a:r>
+              <a:t>Technique 4 — Revisit Your "No" List</a:t>
+            </a:r>
+          </a:p>
+        </p:txBody>
+      </p:sp>
+      <p:sp>
+        <p:nvSpPr>
+          <p:cNvPr id="3" name="Content Placeholder 2"/>
+          <p:cNvSpPr>
+            <a:spLocks noGrp="1"/>
+          </p:cNvSpPr>
+          <p:nvPr>
+            <p:ph idx="1"/>
+          </p:nvPr>
+        </p:nvSpPr>
+        <p:spPr/>
+        <p:txBody>
+          <a:bodyPr/>
+          <a:lstStyle/>
+          <a:p>
+            <a:r>
+              <a:t> What did you decline in the last three years because it was too expensive, too slow, or needed a data science team?</a:t>
+            </a:r>
+          </a:p>
+          <a:p>
+            <a:r>
+              <a:t> Prices have fallen by orders of magnitude. Capability has risen. Some of those decisions were correct then and are wrong now.</a:t>
+            </a:r>
+          </a:p>
+          <a:p>
+            <a:endParaRPr/>
+          </a:p>
+        </p:txBody>
+      </p:sp>
+      <p:sp>
+        <p:nvSpPr>
+          <p:cNvPr id="4" name="TextBox 3"/>
+          <p:cNvSpPr txBox="1"/>
+          <p:nvPr/>
+        </p:nvSpPr>
+        <p:spPr>
+          <a:xfrm>
+            <a:off x="704088" y="8065008"/>
+            <a:ext cx="8915400" cy="228600"/>
+          </a:xfrm>
+          <a:prstGeom prst="rect">
+            <a:avLst/>
+          </a:prstGeom>
+          <a:noFill/>
+        </p:spPr>
+        <p:txBody>
+          <a:bodyPr wrap="none">
+            <a:spAutoFit/>
+          </a:bodyPr>
+          <a:lstStyle/>
+          <a:p>
+            <a:r>
+              <a:rPr sz="800">
+                <a:solidFill>
+                  <a:srgbClr val="000000"/>
+                </a:solidFill>
+              </a:rPr>
+              <a:t>Copyright © 2026 by Elephant Scale, All Rights Reserved</a:t>
+            </a:r>
+          </a:p>
+        </p:txBody>
+      </p:sp>
       <p:sp>
         <p:nvSpPr>
           <p:cNvPr id="5" name="Rectangle 4"/>
@@ -4392,7 +4855,7 @@
         </p:nvSpPr>
         <p:spPr>
           <a:xfrm>
-            <a:off x="571500" y="5444331"/>
+            <a:off x="571500" y="5825331"/>
             <a:ext cx="7507224" cy="1316736"/>
           </a:xfrm>
           <a:prstGeom prst="rect">
@@ -4445,7 +4908,7 @@
 </p:sld>
 </file>
 
-<file path=ppt/slides/slide15.xml><?xml version="1.0" encoding="utf-8"?>
+<file path=ppt/slides/slide17.xml><?xml version="1.0" encoding="utf-8"?>
 <p:sld xmlns:a="http://schemas.openxmlformats.org/drawingml/2006/main" xmlns:r="http://schemas.openxmlformats.org/officeDocument/2006/relationships" xmlns:p="http://schemas.openxmlformats.org/presentationml/2006/main">
   <p:cSld>
     <p:spTree>
@@ -4564,7 +5027,7 @@
 </p:sld>
 </file>
 
-<file path=ppt/slides/slide16.xml><?xml version="1.0" encoding="utf-8"?>
+<file path=ppt/slides/slide18.xml><?xml version="1.0" encoding="utf-8"?>
 <p:sld xmlns:a="http://schemas.openxmlformats.org/drawingml/2006/main" xmlns:r="http://schemas.openxmlformats.org/officeDocument/2006/relationships" xmlns:p="http://schemas.openxmlformats.org/presentationml/2006/main">
   <p:cSld>
     <p:spTree>
@@ -4698,7 +5161,7 @@
         </p:nvSpPr>
         <p:spPr>
           <a:xfrm>
-            <a:off x="495300" y="5444331"/>
+            <a:off x="704088" y="5672931"/>
             <a:ext cx="7507224" cy="1316736"/>
           </a:xfrm>
           <a:prstGeom prst="rect">
@@ -4751,7 +5214,7 @@
 </p:sld>
 </file>
 
-<file path=ppt/slides/slide17.xml><?xml version="1.0" encoding="utf-8"?>
+<file path=ppt/slides/slide19.xml><?xml version="1.0" encoding="utf-8"?>
 <p:sld xmlns:a="http://schemas.openxmlformats.org/drawingml/2006/main" xmlns:r="http://schemas.openxmlformats.org/officeDocument/2006/relationships" xmlns:p="http://schemas.openxmlformats.org/presentationml/2006/main">
   <p:cSld>
     <p:spTree>
@@ -4897,7 +5360,7 @@
 </p:sld>
 </file>
 
-<file path=ppt/slides/slide18.xml><?xml version="1.0" encoding="utf-8"?>
+<file path=ppt/slides/slide2.xml><?xml version="1.0" encoding="utf-8"?>
 <p:sld xmlns:a="http://schemas.openxmlformats.org/drawingml/2006/main" xmlns:r="http://schemas.openxmlformats.org/officeDocument/2006/relationships" xmlns:p="http://schemas.openxmlformats.org/presentationml/2006/main">
   <p:cSld>
     <p:spTree>
@@ -4930,7 +5393,7 @@
           <a:lstStyle/>
           <a:p>
             <a:r>
-              <a:t>Sequencing: Capability, Not Just Projects</a:t>
+              <a:t>The Question This Module Answers</a:t>
             </a:r>
           </a:p>
         </p:txBody>
@@ -4951,36 +5414,16 @@
           <a:lstStyle/>
           <a:p>
             <a:r>
-              <a:t> Each project should leave behind something the next one reuses:</a:t>
-            </a:r>
-          </a:p>
-          <a:p>
-            <a:r>
-              <a:t> Access to a document set that is now clean and governed</a:t>
-            </a:r>
-          </a:p>
-          <a:p>
-            <a:r>
-              <a:t> An approval path someone has already walked</a:t>
-            </a:r>
-          </a:p>
-          <a:p>
-            <a:r>
-              <a:t> A vendor relationship that survived a real deployment</a:t>
-            </a:r>
-          </a:p>
-          <a:p>
-            <a:r>
-              <a:t> People who have now done this once</a:t>
-            </a:r>
-          </a:p>
-          <a:p>
-            <a:r>
-              <a:t> A measurement approach the finance function accepts</a:t>
+              <a:t> You now know what the technology is and where it breaks.</a:t>
             </a:r>
           </a:p>
           <a:p>
             <a:endParaRPr/>
+          </a:p>
+          <a:p>
+            <a:r>
+              <a:t> Not "AI could transform our industry." Which process, whose job, how many hours, what does it cost today.</a:t>
+            </a:r>
           </a:p>
         </p:txBody>
       </p:sp>
@@ -5025,7 +5468,7 @@
         </p:nvSpPr>
         <p:spPr>
           <a:xfrm>
-            <a:off x="495300" y="5291931"/>
+            <a:off x="704088" y="5749131"/>
             <a:ext cx="7507224" cy="877824"/>
           </a:xfrm>
           <a:prstGeom prst="rect">
@@ -5065,7 +5508,7 @@
                   <a:srgbClr val="333333"/>
                 </a:solidFill>
               </a:rPr>
-              <a:t>If project two is as hard as project one, you built a demo, not a capability.</a:t>
+              <a:t>Where, specifically, in your organization, is it worth money?</a:t>
             </a:r>
           </a:p>
         </p:txBody>
@@ -5078,7 +5521,7 @@
 </p:sld>
 </file>
 
-<file path=ppt/slides/slide19.xml><?xml version="1.0" encoding="utf-8"?>
+<file path=ppt/slides/slide20.xml><?xml version="1.0" encoding="utf-8"?>
 <p:sld xmlns:a="http://schemas.openxmlformats.org/drawingml/2006/main" xmlns:r="http://schemas.openxmlformats.org/officeDocument/2006/relationships" xmlns:p="http://schemas.openxmlformats.org/presentationml/2006/main">
   <p:cSld>
     <p:spTree>
@@ -5111,7 +5554,7 @@
           <a:lstStyle/>
           <a:p>
             <a:r>
-              <a:t>Anti-Patterns: How Use Cases Go Wrong</a:t>
+              <a:t>Sequencing: Capability, Not Just Projects</a:t>
             </a:r>
           </a:p>
         </p:txBody>
@@ -5132,57 +5575,36 @@
           <a:lstStyle/>
           <a:p>
             <a:r>
-              <a:rPr b="1"/>
-              <a:t> The solution looking for a problem</a:t>
-            </a:r>
-            <a:r>
-              <a:t> — "we should use AI for something"</a:t>
-            </a:r>
-          </a:p>
-          <a:p>
-            <a:r>
-              <a:rPr b="1"/>
-              <a:t> The unownable project</a:t>
-            </a:r>
-            <a:r>
-              <a:t> — impressive, and no single person's job gets better</a:t>
-            </a:r>
-          </a:p>
-          <a:p>
-            <a:r>
-              <a:rPr b="1"/>
-              <a:t> The demo that can't scale</a:t>
-            </a:r>
-            <a:r>
-              <a:t> — works on ten documents, dies on ten thousand</a:t>
-            </a:r>
-          </a:p>
-          <a:p>
-            <a:r>
-              <a:rPr b="1"/>
-              <a:t> The 100%-accuracy requirement</a:t>
-            </a:r>
-            <a:r>
-              <a:t> — a task where any error is unacceptable and no human review is planned</a:t>
-            </a:r>
-          </a:p>
-          <a:p>
-            <a:r>
-              <a:rPr b="1"/>
-              <a:t> Boiling the ocean</a:t>
-            </a:r>
-            <a:r>
-              <a:t> — "an assistant that knows everything about our organization"</a:t>
-            </a:r>
-          </a:p>
-          <a:p>
-            <a:r>
-              <a:rPr b="1"/>
-              <a:t> Tomorrow's free feature</a:t>
-            </a:r>
-            <a:r>
-              <a:t> — six months of building something your existing software vendor will ship as a checkbox</a:t>
-            </a:r>
+              <a:t> Each project should leave behind something the next one reuses:</a:t>
+            </a:r>
+          </a:p>
+          <a:p>
+            <a:r>
+              <a:t> Access to a document set that is now clean and governed</a:t>
+            </a:r>
+          </a:p>
+          <a:p>
+            <a:r>
+              <a:t> An approval path someone has already walked</a:t>
+            </a:r>
+          </a:p>
+          <a:p>
+            <a:r>
+              <a:t> A vendor relationship that survived a real deployment</a:t>
+            </a:r>
+          </a:p>
+          <a:p>
+            <a:r>
+              <a:t> People who have now done this once</a:t>
+            </a:r>
+          </a:p>
+          <a:p>
+            <a:r>
+              <a:t> A measurement approach the finance function accepts</a:t>
+            </a:r>
+          </a:p>
+          <a:p>
+            <a:endParaRPr/>
           </a:p>
         </p:txBody>
       </p:sp>
@@ -5219,114 +5641,6 @@
           </a:p>
         </p:txBody>
       </p:sp>
-    </p:spTree>
-  </p:cSld>
-  <p:clrMapOvr>
-    <a:masterClrMapping/>
-  </p:clrMapOvr>
-</p:sld>
-</file>
-
-<file path=ppt/slides/slide2.xml><?xml version="1.0" encoding="utf-8"?>
-<p:sld xmlns:a="http://schemas.openxmlformats.org/drawingml/2006/main" xmlns:r="http://schemas.openxmlformats.org/officeDocument/2006/relationships" xmlns:p="http://schemas.openxmlformats.org/presentationml/2006/main">
-  <p:cSld>
-    <p:spTree>
-      <p:nvGrpSpPr>
-        <p:cNvPr id="1" name=""/>
-        <p:cNvGrpSpPr/>
-        <p:nvPr/>
-      </p:nvGrpSpPr>
-      <p:grpSpPr>
-        <a:xfrm>
-          <a:off x="0" y="0"/>
-          <a:ext cx="0" cy="0"/>
-          <a:chOff x="0" y="0"/>
-          <a:chExt cx="0" cy="0"/>
-        </a:xfrm>
-      </p:grpSpPr>
-      <p:sp>
-        <p:nvSpPr>
-          <p:cNvPr id="2" name="Title 1"/>
-          <p:cNvSpPr>
-            <a:spLocks noGrp="1"/>
-          </p:cNvSpPr>
-          <p:nvPr>
-            <p:ph type="title"/>
-          </p:nvPr>
-        </p:nvSpPr>
-        <p:spPr/>
-        <p:txBody>
-          <a:bodyPr/>
-          <a:lstStyle/>
-          <a:p>
-            <a:r>
-              <a:t>The Question This Module Answers</a:t>
-            </a:r>
-          </a:p>
-        </p:txBody>
-      </p:sp>
-      <p:sp>
-        <p:nvSpPr>
-          <p:cNvPr id="3" name="Content Placeholder 2"/>
-          <p:cNvSpPr>
-            <a:spLocks noGrp="1"/>
-          </p:cNvSpPr>
-          <p:nvPr>
-            <p:ph idx="1"/>
-          </p:nvPr>
-        </p:nvSpPr>
-        <p:spPr/>
-        <p:txBody>
-          <a:bodyPr/>
-          <a:lstStyle/>
-          <a:p>
-            <a:r>
-              <a:t> You now know what the technology is and where it breaks.</a:t>
-            </a:r>
-          </a:p>
-          <a:p>
-            <a:endParaRPr/>
-          </a:p>
-          <a:p>
-            <a:r>
-              <a:t> Not "AI could transform our industry." Which process, whose job, how many hours, what does it cost today.</a:t>
-            </a:r>
-          </a:p>
-        </p:txBody>
-      </p:sp>
-      <p:sp>
-        <p:nvSpPr>
-          <p:cNvPr id="4" name="TextBox 3"/>
-          <p:cNvSpPr txBox="1"/>
-          <p:nvPr/>
-        </p:nvSpPr>
-        <p:spPr>
-          <a:xfrm>
-            <a:off x="704088" y="8065008"/>
-            <a:ext cx="8915400" cy="228600"/>
-          </a:xfrm>
-          <a:prstGeom prst="rect">
-            <a:avLst/>
-          </a:prstGeom>
-          <a:noFill/>
-        </p:spPr>
-        <p:txBody>
-          <a:bodyPr wrap="none">
-            <a:spAutoFit/>
-          </a:bodyPr>
-          <a:lstStyle/>
-          <a:p>
-            <a:r>
-              <a:rPr sz="800">
-                <a:solidFill>
-                  <a:srgbClr val="000000"/>
-                </a:solidFill>
-              </a:rPr>
-              <a:t>Copyright © 2026 by Elephant Scale, All Rights Reserved</a:t>
-            </a:r>
-          </a:p>
-        </p:txBody>
-      </p:sp>
       <p:sp>
         <p:nvSpPr>
           <p:cNvPr id="5" name="Rectangle 4"/>
@@ -5335,7 +5649,7 @@
         </p:nvSpPr>
         <p:spPr>
           <a:xfrm>
-            <a:off x="249237" y="6425063"/>
+            <a:off x="495300" y="5901531"/>
             <a:ext cx="7507224" cy="877824"/>
           </a:xfrm>
           <a:prstGeom prst="rect">
@@ -5370,12 +5684,12 @@
           <a:p>
             <a:pPr algn="ctr"/>
             <a:r>
-              <a:rPr sz="1800" i="1">
+              <a:rPr sz="1800" i="1" dirty="0">
                 <a:solidFill>
                   <a:srgbClr val="333333"/>
                 </a:solidFill>
               </a:rPr>
-              <a:t>Where, specifically, in your organization, is it worth money?</a:t>
+              <a:t>If project two is as hard as project one, you built a demo, not a capability.</a:t>
             </a:r>
           </a:p>
         </p:txBody>
@@ -5388,7 +5702,7 @@
 </p:sld>
 </file>
 
-<file path=ppt/slides/slide20.xml><?xml version="1.0" encoding="utf-8"?>
+<file path=ppt/slides/slide21.xml><?xml version="1.0" encoding="utf-8"?>
 <p:sld xmlns:a="http://schemas.openxmlformats.org/drawingml/2006/main" xmlns:r="http://schemas.openxmlformats.org/officeDocument/2006/relationships" xmlns:p="http://schemas.openxmlformats.org/presentationml/2006/main">
   <p:cSld>
     <p:spTree>
@@ -5421,7 +5735,7 @@
           <a:lstStyle/>
           <a:p>
             <a:r>
-              <a:t>The Six Questions That Kill a Bad Use Case</a:t>
+              <a:t>Anti-Patterns: How Use Cases Go Wrong</a:t>
             </a:r>
           </a:p>
         </p:txBody>
@@ -5442,53 +5756,57 @@
           <a:lstStyle/>
           <a:p>
             <a:r>
-              <a:t> Before anything gets funded:</a:t>
-            </a:r>
-          </a:p>
-          <a:p>
-            <a:r>
               <a:rPr b="1"/>
-              <a:t> Whose job gets measurably better?</a:t>
-            </a:r>
-            <a:r>
-              <a:t> (If nobody's — stop.)</a:t>
+              <a:t> The solution looking for a problem</a:t>
+            </a:r>
+            <a:r>
+              <a:t> — "we should use AI for something"</a:t>
             </a:r>
           </a:p>
           <a:p>
             <a:r>
               <a:rPr b="1"/>
-              <a:t> What does this cost us today?</a:t>
-            </a:r>
-            <a:r>
-              <a:t> (If unknown — go find out first.)</a:t>
+              <a:t> The unownable project</a:t>
+            </a:r>
+            <a:r>
+              <a:t> — impressive, and no single person's job gets better</a:t>
             </a:r>
           </a:p>
           <a:p>
             <a:r>
               <a:rPr b="1"/>
-              <a:t> What happens when it's wrong, and who catches it?</a:t>
+              <a:t> The demo that can't scale</a:t>
+            </a:r>
+            <a:r>
+              <a:t> — works on ten documents, dies on ten thousand</a:t>
             </a:r>
           </a:p>
           <a:p>
             <a:r>
               <a:rPr b="1"/>
-              <a:t> Does the data exist, and can we actually get to it?</a:t>
+              <a:t> The 100%-accuracy requirement</a:t>
+            </a:r>
+            <a:r>
+              <a:t> — a task where any error is unacceptable and no human review is planned</a:t>
             </a:r>
           </a:p>
           <a:p>
             <a:r>
               <a:rPr b="1"/>
-              <a:t> How will we know in 90 days whether it worked?</a:t>
+              <a:t> Boiling the ocean</a:t>
+            </a:r>
+            <a:r>
+              <a:t> — "an assistant that knows everything about our organization"</a:t>
             </a:r>
           </a:p>
           <a:p>
             <a:r>
               <a:rPr b="1"/>
-              <a:t> What would make us stop?</a:t>
-            </a:r>
-          </a:p>
-          <a:p>
-            <a:endParaRPr b="1"/>
+              <a:t> Tomorrow's free feature</a:t>
+            </a:r>
+            <a:r>
+              <a:t> — six months of building something your existing software vendor will ship as a checkbox</a:t>
+            </a:r>
           </a:p>
         </p:txBody>
       </p:sp>
@@ -5525,6 +5843,151 @@
           </a:p>
         </p:txBody>
       </p:sp>
+    </p:spTree>
+  </p:cSld>
+  <p:clrMapOvr>
+    <a:masterClrMapping/>
+  </p:clrMapOvr>
+</p:sld>
+</file>
+
+<file path=ppt/slides/slide22.xml><?xml version="1.0" encoding="utf-8"?>
+<p:sld xmlns:a="http://schemas.openxmlformats.org/drawingml/2006/main" xmlns:r="http://schemas.openxmlformats.org/officeDocument/2006/relationships" xmlns:p="http://schemas.openxmlformats.org/presentationml/2006/main">
+  <p:cSld>
+    <p:spTree>
+      <p:nvGrpSpPr>
+        <p:cNvPr id="1" name=""/>
+        <p:cNvGrpSpPr/>
+        <p:nvPr/>
+      </p:nvGrpSpPr>
+      <p:grpSpPr>
+        <a:xfrm>
+          <a:off x="0" y="0"/>
+          <a:ext cx="0" cy="0"/>
+          <a:chOff x="0" y="0"/>
+          <a:chExt cx="0" cy="0"/>
+        </a:xfrm>
+      </p:grpSpPr>
+      <p:sp>
+        <p:nvSpPr>
+          <p:cNvPr id="2" name="Title 1"/>
+          <p:cNvSpPr>
+            <a:spLocks noGrp="1"/>
+          </p:cNvSpPr>
+          <p:nvPr>
+            <p:ph type="title"/>
+          </p:nvPr>
+        </p:nvSpPr>
+        <p:spPr/>
+        <p:txBody>
+          <a:bodyPr/>
+          <a:lstStyle/>
+          <a:p>
+            <a:r>
+              <a:t>The Six Questions That Kill a Bad Use Case</a:t>
+            </a:r>
+          </a:p>
+        </p:txBody>
+      </p:sp>
+      <p:sp>
+        <p:nvSpPr>
+          <p:cNvPr id="3" name="Content Placeholder 2"/>
+          <p:cNvSpPr>
+            <a:spLocks noGrp="1"/>
+          </p:cNvSpPr>
+          <p:nvPr>
+            <p:ph idx="1"/>
+          </p:nvPr>
+        </p:nvSpPr>
+        <p:spPr/>
+        <p:txBody>
+          <a:bodyPr/>
+          <a:lstStyle/>
+          <a:p>
+            <a:r>
+              <a:t> Before anything gets funded:</a:t>
+            </a:r>
+          </a:p>
+          <a:p>
+            <a:r>
+              <a:rPr b="1"/>
+              <a:t> Whose job gets measurably better?</a:t>
+            </a:r>
+            <a:r>
+              <a:t> (If nobody's — stop.)</a:t>
+            </a:r>
+          </a:p>
+          <a:p>
+            <a:r>
+              <a:rPr b="1"/>
+              <a:t> What does this cost us today?</a:t>
+            </a:r>
+            <a:r>
+              <a:t> (If unknown — go find out first.)</a:t>
+            </a:r>
+          </a:p>
+          <a:p>
+            <a:r>
+              <a:rPr b="1"/>
+              <a:t> What happens when it's wrong, and who catches it?</a:t>
+            </a:r>
+          </a:p>
+          <a:p>
+            <a:r>
+              <a:rPr b="1"/>
+              <a:t> Does the data exist, and can we actually get to it?</a:t>
+            </a:r>
+          </a:p>
+          <a:p>
+            <a:r>
+              <a:rPr b="1"/>
+              <a:t> How will we know in 90 days whether it worked?</a:t>
+            </a:r>
+          </a:p>
+          <a:p>
+            <a:r>
+              <a:rPr b="1"/>
+              <a:t> What would make us stop?</a:t>
+            </a:r>
+          </a:p>
+          <a:p>
+            <a:endParaRPr b="1"/>
+          </a:p>
+        </p:txBody>
+      </p:sp>
+      <p:sp>
+        <p:nvSpPr>
+          <p:cNvPr id="4" name="TextBox 3"/>
+          <p:cNvSpPr txBox="1"/>
+          <p:nvPr/>
+        </p:nvSpPr>
+        <p:spPr>
+          <a:xfrm>
+            <a:off x="704088" y="8065008"/>
+            <a:ext cx="8915400" cy="228600"/>
+          </a:xfrm>
+          <a:prstGeom prst="rect">
+            <a:avLst/>
+          </a:prstGeom>
+          <a:noFill/>
+        </p:spPr>
+        <p:txBody>
+          <a:bodyPr wrap="none">
+            <a:spAutoFit/>
+          </a:bodyPr>
+          <a:lstStyle/>
+          <a:p>
+            <a:r>
+              <a:rPr sz="800">
+                <a:solidFill>
+                  <a:srgbClr val="000000"/>
+                </a:solidFill>
+              </a:rPr>
+              <a:t>Copyright © 2026 by Elephant Scale, All Rights Reserved</a:t>
+            </a:r>
+          </a:p>
+        </p:txBody>
+      </p:sp>
       <p:sp>
         <p:nvSpPr>
           <p:cNvPr id="5" name="Rectangle 4"/>
@@ -5533,7 +5996,7 @@
         </p:nvSpPr>
         <p:spPr>
           <a:xfrm>
-            <a:off x="495300" y="5749131"/>
+            <a:off x="495300" y="5969113"/>
             <a:ext cx="7507224" cy="1316736"/>
           </a:xfrm>
           <a:prstGeom prst="rect">
@@ -5586,277 +6049,6 @@
 </p:sld>
 </file>
 
-<file path=ppt/slides/slide21.xml><?xml version="1.0" encoding="utf-8"?>
-<p:sld xmlns:a="http://schemas.openxmlformats.org/drawingml/2006/main" xmlns:r="http://schemas.openxmlformats.org/officeDocument/2006/relationships" xmlns:p="http://schemas.openxmlformats.org/presentationml/2006/main">
-  <p:cSld>
-    <p:spTree>
-      <p:nvGrpSpPr>
-        <p:cNvPr id="1" name=""/>
-        <p:cNvGrpSpPr/>
-        <p:nvPr/>
-      </p:nvGrpSpPr>
-      <p:grpSpPr>
-        <a:xfrm>
-          <a:off x="0" y="0"/>
-          <a:ext cx="0" cy="0"/>
-          <a:chOff x="0" y="0"/>
-          <a:chExt cx="0" cy="0"/>
-        </a:xfrm>
-      </p:grpSpPr>
-      <p:sp>
-        <p:nvSpPr>
-          <p:cNvPr id="2" name="Subtitle 1"/>
-          <p:cNvSpPr>
-            <a:spLocks noGrp="1"/>
-          </p:cNvSpPr>
-          <p:nvPr>
-            <p:ph type="subTitle" sz="quarter" idx="1"/>
-          </p:nvPr>
-        </p:nvSpPr>
-        <p:spPr/>
-        <p:txBody>
-          <a:bodyPr/>
-          <a:lstStyle/>
-          <a:p>
-            <a:pPr>
-              <a:defRPr sz="3200"/>
-            </a:pPr>
-            <a:r>
-              <a:t>Finding Candidates
-Choosing Among Them
-</a:t>
-            </a:r>
-            <a:r>
-              <a:rPr b="1"/>
-              <a:t>Exercise 4 — The Use-Case Portfolio
-</a:t>
-            </a:r>
-            <a:r>
-              <a:t>End of Day 1
-</a:t>
-            </a:r>
-          </a:p>
-        </p:txBody>
-      </p:sp>
-      <p:sp>
-        <p:nvSpPr>
-          <p:cNvPr id="3" name="Title 2"/>
-          <p:cNvSpPr>
-            <a:spLocks noGrp="1"/>
-          </p:cNvSpPr>
-          <p:nvPr>
-            <p:ph type="ctrTitle" sz="quarter"/>
-          </p:nvPr>
-        </p:nvSpPr>
-        <p:spPr/>
-        <p:txBody>
-          <a:bodyPr wrap="square">
-            <a:noAutofit/>
-          </a:bodyPr>
-          <a:lstStyle/>
-          <a:p>
-            <a:r>
-              <a:rPr sz="4200" b="1" i="0">
-                <a:latin typeface="Times New Roman"/>
-              </a:rPr>
-              <a:t>Exercise 4 — The Use-Case Portfolio</a:t>
-            </a:r>
-          </a:p>
-        </p:txBody>
-      </p:sp>
-      <p:sp>
-        <p:nvSpPr>
-          <p:cNvPr id="4" name="TextBox 3"/>
-          <p:cNvSpPr txBox="1"/>
-          <p:nvPr/>
-        </p:nvSpPr>
-        <p:spPr>
-          <a:xfrm>
-            <a:off x="704088" y="8065008"/>
-            <a:ext cx="8915400" cy="228600"/>
-          </a:xfrm>
-          <a:prstGeom prst="rect">
-            <a:avLst/>
-          </a:prstGeom>
-          <a:noFill/>
-        </p:spPr>
-        <p:txBody>
-          <a:bodyPr wrap="none">
-            <a:spAutoFit/>
-          </a:bodyPr>
-          <a:lstStyle/>
-          <a:p>
-            <a:r>
-              <a:rPr sz="800">
-                <a:solidFill>
-                  <a:srgbClr val="000000"/>
-                </a:solidFill>
-              </a:rPr>
-              <a:t>Copyright © 2026 by Elephant Scale, All Rights Reserved</a:t>
-            </a:r>
-          </a:p>
-        </p:txBody>
-      </p:sp>
-    </p:spTree>
-  </p:cSld>
-  <p:clrMapOvr>
-    <a:masterClrMapping/>
-  </p:clrMapOvr>
-</p:sld>
-</file>
-
-<file path=ppt/slides/slide22.xml><?xml version="1.0" encoding="utf-8"?>
-<p:sld xmlns:a="http://schemas.openxmlformats.org/drawingml/2006/main" xmlns:r="http://schemas.openxmlformats.org/officeDocument/2006/relationships" xmlns:p="http://schemas.openxmlformats.org/presentationml/2006/main">
-  <p:cSld>
-    <p:spTree>
-      <p:nvGrpSpPr>
-        <p:cNvPr id="1" name=""/>
-        <p:cNvGrpSpPr/>
-        <p:nvPr/>
-      </p:nvGrpSpPr>
-      <p:grpSpPr>
-        <a:xfrm>
-          <a:off x="0" y="0"/>
-          <a:ext cx="0" cy="0"/>
-          <a:chOff x="0" y="0"/>
-          <a:chExt cx="0" cy="0"/>
-        </a:xfrm>
-      </p:grpSpPr>
-      <p:sp>
-        <p:nvSpPr>
-          <p:cNvPr id="2" name="Title 1"/>
-          <p:cNvSpPr>
-            <a:spLocks noGrp="1"/>
-          </p:cNvSpPr>
-          <p:nvPr>
-            <p:ph type="title"/>
-          </p:nvPr>
-        </p:nvSpPr>
-        <p:spPr/>
-        <p:txBody>
-          <a:bodyPr/>
-          <a:lstStyle/>
-          <a:p>
-            <a:r>
-              <a:t>Exercise 4 — The Use-Case Portfolio</a:t>
-            </a:r>
-          </a:p>
-        </p:txBody>
-      </p:sp>
-      <p:sp>
-        <p:nvSpPr>
-          <p:cNvPr id="3" name="Content Placeholder 2"/>
-          <p:cNvSpPr>
-            <a:spLocks noGrp="1"/>
-          </p:cNvSpPr>
-          <p:nvPr>
-            <p:ph idx="1"/>
-          </p:nvPr>
-        </p:nvSpPr>
-        <p:spPr/>
-        <p:txBody>
-          <a:bodyPr/>
-          <a:lstStyle/>
-          <a:p>
-            <a:r>
-              <a:rPr b="1"/>
-              <a:t> Format:</a:t>
-            </a:r>
-            <a:r>
-              <a:t> teams of 3–4, 60 minutes. This is the biggest exercise of Day 1.</a:t>
-            </a:r>
-          </a:p>
-          <a:p>
-            <a:r>
-              <a:rPr b="1"/>
-              <a:t> Part 1 — Generate (20 min).</a:t>
-            </a:r>
-            <a:r>
-              <a:t> Using the friction audit, the retyping test, the bottleneck question, and the "no" list, produce</a:t>
-            </a:r>
-            <a:r>
-              <a:rPr b="1"/>
-              <a:t> at least twelve</a:t>
-            </a:r>
-            <a:r>
-              <a:t> candidates from your own organization. Quantity first. No filtering yet.</a:t>
-            </a:r>
-          </a:p>
-          <a:p>
-            <a:r>
-              <a:rPr b="1"/>
-              <a:t> Part 2 — Score (20 min).</a:t>
-            </a:r>
-            <a:r>
-              <a:t> Score each on value, feasibility, data readiness, and risk. Place them on the grid.</a:t>
-            </a:r>
-          </a:p>
-          <a:p>
-            <a:r>
-              <a:rPr b="1"/>
-              <a:t> Part 3 — Choose (20 min).</a:t>
-            </a:r>
-            <a:r>
-              <a:t> Pick one</a:t>
-            </a:r>
-            <a:r>
-              <a:rPr b="1"/>
-              <a:t> quick win</a:t>
-            </a:r>
-            <a:r>
-              <a:t> and one</a:t>
-            </a:r>
-            <a:r>
-              <a:rPr b="1"/>
-              <a:t> strategic bet</a:t>
-            </a:r>
-            <a:r>
-              <a:t> . Run both through the six questions. Prepare a two-minute defense of each.</a:t>
-            </a:r>
-          </a:p>
-        </p:txBody>
-      </p:sp>
-      <p:sp>
-        <p:nvSpPr>
-          <p:cNvPr id="4" name="TextBox 3"/>
-          <p:cNvSpPr txBox="1"/>
-          <p:nvPr/>
-        </p:nvSpPr>
-        <p:spPr>
-          <a:xfrm>
-            <a:off x="704088" y="8065008"/>
-            <a:ext cx="8915400" cy="228600"/>
-          </a:xfrm>
-          <a:prstGeom prst="rect">
-            <a:avLst/>
-          </a:prstGeom>
-          <a:noFill/>
-        </p:spPr>
-        <p:txBody>
-          <a:bodyPr wrap="none">
-            <a:spAutoFit/>
-          </a:bodyPr>
-          <a:lstStyle/>
-          <a:p>
-            <a:r>
-              <a:rPr sz="800">
-                <a:solidFill>
-                  <a:srgbClr val="000000"/>
-                </a:solidFill>
-              </a:rPr>
-              <a:t>Copyright © 2026 by Elephant Scale, All Rights Reserved</a:t>
-            </a:r>
-          </a:p>
-        </p:txBody>
-      </p:sp>
-    </p:spTree>
-  </p:cSld>
-  <p:clrMapOvr>
-    <a:masterClrMapping/>
-  </p:clrMapOvr>
-</p:sld>
-</file>
-
 <file path=ppt/slides/slide23.xml><?xml version="1.0" encoding="utf-8"?>
 <p:sld xmlns:a="http://schemas.openxmlformats.org/drawingml/2006/main" xmlns:r="http://schemas.openxmlformats.org/officeDocument/2006/relationships" xmlns:p="http://schemas.openxmlformats.org/presentationml/2006/main">
   <p:cSld>
@@ -5876,12 +6068,12 @@
       </p:grpSpPr>
       <p:sp>
         <p:nvSpPr>
-          <p:cNvPr id="2" name="Title 1"/>
-          <p:cNvSpPr>
-            <a:spLocks noGrp="1"/>
-          </p:cNvSpPr>
-          <p:nvPr>
-            <p:ph type="title"/>
+          <p:cNvPr id="2" name="Subtitle 1"/>
+          <p:cNvSpPr>
+            <a:spLocks noGrp="1"/>
+          </p:cNvSpPr>
+          <p:nvPr>
+            <p:ph type="subTitle" sz="quarter" idx="1"/>
           </p:nvPr>
         </p:nvSpPr>
         <p:spPr/>
@@ -5889,43 +6081,48 @@
           <a:bodyPr/>
           <a:lstStyle/>
           <a:p>
-            <a:r>
-              <a:t>Exercise 4 — Debrief and Vote</a:t>
-            </a:r>
-          </a:p>
-        </p:txBody>
-      </p:sp>
-      <p:sp>
-        <p:nvSpPr>
-          <p:cNvPr id="3" name="Content Placeholder 2"/>
-          <p:cNvSpPr>
-            <a:spLocks noGrp="1"/>
-          </p:cNvSpPr>
-          <p:nvPr>
-            <p:ph idx="1"/>
-          </p:nvPr>
-        </p:nvSpPr>
-        <p:spPr/>
-        <p:txBody>
-          <a:bodyPr/>
-          <a:lstStyle/>
-          <a:p>
-            <a:r>
-              <a:t> Each team presents its quick win and its strategic bet. Two minutes each.</a:t>
-            </a:r>
-          </a:p>
-          <a:p>
-            <a:r>
-              <a:t> The room challenges with the six questions.</a:t>
-            </a:r>
-          </a:p>
-          <a:p>
-            <a:r>
-              <a:t> Then the room votes:</a:t>
+            <a:pPr>
+              <a:defRPr sz="3200"/>
+            </a:pPr>
+            <a:r>
+              <a:t>Finding Candidates
+Choosing Among Them
+</a:t>
             </a:r>
             <a:r>
               <a:rPr b="1"/>
-              <a:t> which quick win would you fund on Monday?</a:t>
+              <a:t>Exercise 4 — The Use-Case Portfolio
+</a:t>
+            </a:r>
+            <a:r>
+              <a:t>End of Day 1
+</a:t>
+            </a:r>
+          </a:p>
+        </p:txBody>
+      </p:sp>
+      <p:sp>
+        <p:nvSpPr>
+          <p:cNvPr id="3" name="Title 2"/>
+          <p:cNvSpPr>
+            <a:spLocks noGrp="1"/>
+          </p:cNvSpPr>
+          <p:nvPr>
+            <p:ph type="ctrTitle" sz="quarter"/>
+          </p:nvPr>
+        </p:nvSpPr>
+        <p:spPr/>
+        <p:txBody>
+          <a:bodyPr wrap="square">
+            <a:noAutofit/>
+          </a:bodyPr>
+          <a:lstStyle/>
+          <a:p>
+            <a:r>
+              <a:rPr sz="4200" b="1" i="0">
+                <a:latin typeface="Times New Roman"/>
+              </a:rPr>
+              <a:t>Exercise 4 — The Use-Case Portfolio</a:t>
             </a:r>
           </a:p>
         </p:txBody>
@@ -6004,7 +6201,7 @@
           <a:lstStyle/>
           <a:p>
             <a:r>
-              <a:t>Exercise 4 — Carry This Forward</a:t>
+              <a:t>Exercise 4 — The Use-Case Portfolio</a:t>
             </a:r>
           </a:p>
         </p:txBody>
@@ -6025,57 +6222,59 @@
           <a:lstStyle/>
           <a:p>
             <a:r>
-              <a:t> Your scored portfolio is an input to the rest of the course:</a:t>
-            </a:r>
-          </a:p>
-          <a:p>
-            <a:r>
               <a:rPr b="1"/>
-              <a:t> Module 5</a:t>
-            </a:r>
-            <a:r>
-              <a:t> — does your maturity level support your strategic bet?</a:t>
+              <a:t> Format:</a:t>
+            </a:r>
+            <a:r>
+              <a:t> teams of 3–4, 60 minutes. This is the biggest exercise of Day 1.</a:t>
             </a:r>
           </a:p>
           <a:p>
             <a:r>
               <a:rPr b="1"/>
-              <a:t> Module 6</a:t>
-            </a:r>
-            <a:r>
-              <a:t> — who resists this, and what do you say to them?</a:t>
-            </a:r>
-          </a:p>
-          <a:p>
+              <a:t> Part 1 — Generate (20 min).</a:t>
+            </a:r>
+            <a:r>
+              <a:t> Using the friction audit, the retyping test, the bottleneck question, and the "no" list, produce</a:t>
+            </a:r>
             <a:r>
               <a:rPr b="1"/>
-              <a:t> Module 7</a:t>
-            </a:r>
-            <a:r>
-              <a:t> — what controls does it need?</a:t>
+              <a:t> at least twelve</a:t>
+            </a:r>
+            <a:r>
+              <a:t> candidates from your own organization. Quantity first. No filtering yet.</a:t>
             </a:r>
           </a:p>
           <a:p>
             <a:r>
               <a:rPr b="1"/>
-              <a:t> Module 8</a:t>
-            </a:r>
-            <a:r>
-              <a:t> — what is the business case, and can it be done no-code?</a:t>
+              <a:t> Part 2 — Score (20 min).</a:t>
+            </a:r>
+            <a:r>
+              <a:t> Score each on value, feasibility, data readiness, and risk. Place them on the grid.</a:t>
             </a:r>
           </a:p>
           <a:p>
             <a:r>
               <a:rPr b="1"/>
-              <a:t> Capstone</a:t>
-            </a:r>
-            <a:r>
-              <a:t> — pitch it and defend it</a:t>
-            </a:r>
-          </a:p>
-          <a:p>
-            <a:r>
-              <a:t> Keep the sheet. Bring it tomorrow.</a:t>
+              <a:t> Part 3 — Choose (20 min).</a:t>
+            </a:r>
+            <a:r>
+              <a:t> Pick one</a:t>
+            </a:r>
+            <a:r>
+              <a:rPr b="1"/>
+              <a:t> quick win</a:t>
+            </a:r>
+            <a:r>
+              <a:t> and one</a:t>
+            </a:r>
+            <a:r>
+              <a:rPr b="1"/>
+              <a:t> strategic bet</a:t>
+            </a:r>
+            <a:r>
+              <a:t> . Run both through the six questions. Prepare a two-minute defense of each.</a:t>
             </a:r>
           </a:p>
         </p:txBody>
@@ -6154,7 +6353,7 @@
           <a:lstStyle/>
           <a:p>
             <a:r>
-              <a:t>Module 4 — Takeaways</a:t>
+              <a:t>Exercise 4 — Debrief and Vote</a:t>
             </a:r>
           </a:p>
         </p:txBody>
@@ -6175,46 +6374,21 @@
           <a:lstStyle/>
           <a:p>
             <a:r>
-              <a:t> Value comes from cost, speed, quality,</a:t>
+              <a:t> Each team presents its quick win and its strategic bet. Two minutes each.</a:t>
+            </a:r>
+          </a:p>
+          <a:p>
+            <a:r>
+              <a:t> The room challenges with the six questions.</a:t>
+            </a:r>
+          </a:p>
+          <a:p>
+            <a:r>
+              <a:t> Then the room votes:</a:t>
             </a:r>
             <a:r>
               <a:rPr b="1"/>
-              <a:t> capacity</a:t>
-            </a:r>
-            <a:r>
-              <a:t> , and new capability — and capacity is the one you're undercounting</a:t>
-            </a:r>
-          </a:p>
-          <a:p>
-            <a:r>
-              <a:t> Eight patterns cover nearly every real use case</a:t>
-            </a:r>
-          </a:p>
-          <a:p>
-            <a:r>
-              <a:t> Find candidates by auditing friction, following the retyping, hunting the bottleneck, and revisiting your "no" list</a:t>
-            </a:r>
-          </a:p>
-          <a:p>
-            <a:r>
-              <a:t> Score on value, feasibility,</a:t>
-            </a:r>
-            <a:r>
-              <a:rPr b="1"/>
-              <a:t> data readiness</a:t>
-            </a:r>
-            <a:r>
-              <a:t> , and risk — data readiness kills more projects than anything else</a:t>
-            </a:r>
-          </a:p>
-          <a:p>
-            <a:r>
-              <a:t> Build a portfolio: quick wins, strategic bets, and a documented "not now"</a:t>
-            </a:r>
-          </a:p>
-          <a:p>
-            <a:r>
-              <a:t> Six questions kill a bad use case before it costs anything</a:t>
+              <a:t> which quick win would you fund on Monday?</a:t>
             </a:r>
           </a:p>
         </p:txBody>
@@ -6279,12 +6453,12 @@
       </p:grpSpPr>
       <p:sp>
         <p:nvSpPr>
-          <p:cNvPr id="2" name="Subtitle 1"/>
-          <p:cNvSpPr>
-            <a:spLocks noGrp="1"/>
-          </p:cNvSpPr>
-          <p:nvPr>
-            <p:ph type="subTitle" sz="quarter" idx="1"/>
+          <p:cNvPr id="2" name="Title 1"/>
+          <p:cNvSpPr>
+            <a:spLocks noGrp="1"/>
+          </p:cNvSpPr>
+          <p:nvPr>
+            <p:ph type="title"/>
           </p:nvPr>
         </p:nvSpPr>
         <p:spPr/>
@@ -6292,45 +6466,79 @@
           <a:bodyPr/>
           <a:lstStyle/>
           <a:p>
-            <a:pPr>
-              <a:defRPr sz="3200"/>
-            </a:pPr>
-            <a:r>
-              <a:t>Finding Candidates
-Choosing Among Them
-Exercise 4 — The Use-Case Portfolio
-</a:t>
-            </a:r>
+            <a:r>
+              <a:t>Exercise 4 — Carry This Forward</a:t>
+            </a:r>
+          </a:p>
+        </p:txBody>
+      </p:sp>
+      <p:sp>
+        <p:nvSpPr>
+          <p:cNvPr id="3" name="Content Placeholder 2"/>
+          <p:cNvSpPr>
+            <a:spLocks noGrp="1"/>
+          </p:cNvSpPr>
+          <p:nvPr>
+            <p:ph idx="1"/>
+          </p:nvPr>
+        </p:nvSpPr>
+        <p:spPr/>
+        <p:txBody>
+          <a:bodyPr/>
+          <a:lstStyle/>
+          <a:p>
+            <a:r>
+              <a:t> Your scored portfolio is an input to the rest of the course:</a:t>
+            </a:r>
+          </a:p>
+          <a:p>
             <a:r>
               <a:rPr b="1"/>
-              <a:t>End of Day 1
-</a:t>
-            </a:r>
-          </a:p>
-        </p:txBody>
-      </p:sp>
-      <p:sp>
-        <p:nvSpPr>
-          <p:cNvPr id="3" name="Title 2"/>
-          <p:cNvSpPr>
-            <a:spLocks noGrp="1"/>
-          </p:cNvSpPr>
-          <p:nvPr>
-            <p:ph type="ctrTitle" sz="quarter"/>
-          </p:nvPr>
-        </p:nvSpPr>
-        <p:spPr/>
-        <p:txBody>
-          <a:bodyPr wrap="square">
-            <a:noAutofit/>
-          </a:bodyPr>
-          <a:lstStyle/>
-          <a:p>
-            <a:r>
-              <a:rPr sz="4200" b="1" i="0">
-                <a:latin typeface="Times New Roman"/>
-              </a:rPr>
-              <a:t>End of Day 1</a:t>
+              <a:t> Module 5</a:t>
+            </a:r>
+            <a:r>
+              <a:t> — does your maturity level support your strategic bet?</a:t>
+            </a:r>
+          </a:p>
+          <a:p>
+            <a:r>
+              <a:rPr b="1"/>
+              <a:t> Module 6</a:t>
+            </a:r>
+            <a:r>
+              <a:t> — who resists this, and what do you say to them?</a:t>
+            </a:r>
+          </a:p>
+          <a:p>
+            <a:r>
+              <a:rPr b="1"/>
+              <a:t> Module 7</a:t>
+            </a:r>
+            <a:r>
+              <a:t> — what controls does it need?</a:t>
+            </a:r>
+          </a:p>
+          <a:p>
+            <a:r>
+              <a:rPr b="1"/>
+              <a:t> Module 8</a:t>
+            </a:r>
+            <a:r>
+              <a:t> — what is the business case, and can it be done no-code?</a:t>
+            </a:r>
+          </a:p>
+          <a:p>
+            <a:r>
+              <a:rPr b="1"/>
+              <a:t> Capstone</a:t>
+            </a:r>
+            <a:r>
+              <a:t> — pitch it and defend it</a:t>
+            </a:r>
+          </a:p>
+          <a:p>
+            <a:r>
+              <a:t> Keep the sheet. Bring it tomorrow.</a:t>
             </a:r>
           </a:p>
         </p:txBody>
@@ -6409,6 +6617,261 @@
           <a:lstStyle/>
           <a:p>
             <a:r>
+              <a:t>Module 4 — Takeaways</a:t>
+            </a:r>
+          </a:p>
+        </p:txBody>
+      </p:sp>
+      <p:sp>
+        <p:nvSpPr>
+          <p:cNvPr id="3" name="Content Placeholder 2"/>
+          <p:cNvSpPr>
+            <a:spLocks noGrp="1"/>
+          </p:cNvSpPr>
+          <p:nvPr>
+            <p:ph idx="1"/>
+          </p:nvPr>
+        </p:nvSpPr>
+        <p:spPr/>
+        <p:txBody>
+          <a:bodyPr/>
+          <a:lstStyle/>
+          <a:p>
+            <a:r>
+              <a:t> Value comes from cost, speed, quality,</a:t>
+            </a:r>
+            <a:r>
+              <a:rPr b="1"/>
+              <a:t> capacity</a:t>
+            </a:r>
+            <a:r>
+              <a:t> , and new capability — and capacity is the one you're undercounting</a:t>
+            </a:r>
+          </a:p>
+          <a:p>
+            <a:r>
+              <a:t> Eight patterns cover nearly every real use case</a:t>
+            </a:r>
+          </a:p>
+          <a:p>
+            <a:r>
+              <a:t> Find candidates by auditing friction, following the retyping, hunting the bottleneck, and revisiting your "no" list</a:t>
+            </a:r>
+          </a:p>
+          <a:p>
+            <a:r>
+              <a:t> Score on value, feasibility,</a:t>
+            </a:r>
+            <a:r>
+              <a:rPr b="1"/>
+              <a:t> data readiness</a:t>
+            </a:r>
+            <a:r>
+              <a:t> , and risk — data readiness kills more projects than anything else</a:t>
+            </a:r>
+          </a:p>
+          <a:p>
+            <a:r>
+              <a:t> Build a portfolio: quick wins, strategic bets, and a documented "not now"</a:t>
+            </a:r>
+          </a:p>
+          <a:p>
+            <a:r>
+              <a:t> Six questions kill a bad use case before it costs anything</a:t>
+            </a:r>
+          </a:p>
+        </p:txBody>
+      </p:sp>
+      <p:sp>
+        <p:nvSpPr>
+          <p:cNvPr id="4" name="TextBox 3"/>
+          <p:cNvSpPr txBox="1"/>
+          <p:nvPr/>
+        </p:nvSpPr>
+        <p:spPr>
+          <a:xfrm>
+            <a:off x="704088" y="8065008"/>
+            <a:ext cx="8915400" cy="228600"/>
+          </a:xfrm>
+          <a:prstGeom prst="rect">
+            <a:avLst/>
+          </a:prstGeom>
+          <a:noFill/>
+        </p:spPr>
+        <p:txBody>
+          <a:bodyPr wrap="none">
+            <a:spAutoFit/>
+          </a:bodyPr>
+          <a:lstStyle/>
+          <a:p>
+            <a:r>
+              <a:rPr sz="800">
+                <a:solidFill>
+                  <a:srgbClr val="000000"/>
+                </a:solidFill>
+              </a:rPr>
+              <a:t>Copyright © 2026 by Elephant Scale, All Rights Reserved</a:t>
+            </a:r>
+          </a:p>
+        </p:txBody>
+      </p:sp>
+    </p:spTree>
+  </p:cSld>
+  <p:clrMapOvr>
+    <a:masterClrMapping/>
+  </p:clrMapOvr>
+</p:sld>
+</file>
+
+<file path=ppt/slides/slide28.xml><?xml version="1.0" encoding="utf-8"?>
+<p:sld xmlns:a="http://schemas.openxmlformats.org/drawingml/2006/main" xmlns:r="http://schemas.openxmlformats.org/officeDocument/2006/relationships" xmlns:p="http://schemas.openxmlformats.org/presentationml/2006/main">
+  <p:cSld>
+    <p:spTree>
+      <p:nvGrpSpPr>
+        <p:cNvPr id="1" name=""/>
+        <p:cNvGrpSpPr/>
+        <p:nvPr/>
+      </p:nvGrpSpPr>
+      <p:grpSpPr>
+        <a:xfrm>
+          <a:off x="0" y="0"/>
+          <a:ext cx="0" cy="0"/>
+          <a:chOff x="0" y="0"/>
+          <a:chExt cx="0" cy="0"/>
+        </a:xfrm>
+      </p:grpSpPr>
+      <p:sp>
+        <p:nvSpPr>
+          <p:cNvPr id="2" name="Subtitle 1"/>
+          <p:cNvSpPr>
+            <a:spLocks noGrp="1"/>
+          </p:cNvSpPr>
+          <p:nvPr>
+            <p:ph type="subTitle" sz="quarter" idx="1"/>
+          </p:nvPr>
+        </p:nvSpPr>
+        <p:spPr/>
+        <p:txBody>
+          <a:bodyPr/>
+          <a:lstStyle/>
+          <a:p>
+            <a:pPr>
+              <a:defRPr sz="3200"/>
+            </a:pPr>
+            <a:r>
+              <a:t>Finding Candidates
+Choosing Among Them
+Exercise 4 — The Use-Case Portfolio
+</a:t>
+            </a:r>
+            <a:r>
+              <a:rPr b="1"/>
+              <a:t>End of Day 1
+</a:t>
+            </a:r>
+          </a:p>
+        </p:txBody>
+      </p:sp>
+      <p:sp>
+        <p:nvSpPr>
+          <p:cNvPr id="3" name="Title 2"/>
+          <p:cNvSpPr>
+            <a:spLocks noGrp="1"/>
+          </p:cNvSpPr>
+          <p:nvPr>
+            <p:ph type="ctrTitle" sz="quarter"/>
+          </p:nvPr>
+        </p:nvSpPr>
+        <p:spPr/>
+        <p:txBody>
+          <a:bodyPr wrap="square">
+            <a:noAutofit/>
+          </a:bodyPr>
+          <a:lstStyle/>
+          <a:p>
+            <a:r>
+              <a:rPr sz="4200" b="1" i="0">
+                <a:latin typeface="Times New Roman"/>
+              </a:rPr>
+              <a:t>End of Day 1</a:t>
+            </a:r>
+          </a:p>
+        </p:txBody>
+      </p:sp>
+      <p:sp>
+        <p:nvSpPr>
+          <p:cNvPr id="4" name="TextBox 3"/>
+          <p:cNvSpPr txBox="1"/>
+          <p:nvPr/>
+        </p:nvSpPr>
+        <p:spPr>
+          <a:xfrm>
+            <a:off x="704088" y="8065008"/>
+            <a:ext cx="8915400" cy="228600"/>
+          </a:xfrm>
+          <a:prstGeom prst="rect">
+            <a:avLst/>
+          </a:prstGeom>
+          <a:noFill/>
+        </p:spPr>
+        <p:txBody>
+          <a:bodyPr wrap="none">
+            <a:spAutoFit/>
+          </a:bodyPr>
+          <a:lstStyle/>
+          <a:p>
+            <a:r>
+              <a:rPr sz="800">
+                <a:solidFill>
+                  <a:srgbClr val="000000"/>
+                </a:solidFill>
+              </a:rPr>
+              <a:t>Copyright © 2026 by Elephant Scale, All Rights Reserved</a:t>
+            </a:r>
+          </a:p>
+        </p:txBody>
+      </p:sp>
+    </p:spTree>
+  </p:cSld>
+  <p:clrMapOvr>
+    <a:masterClrMapping/>
+  </p:clrMapOvr>
+</p:sld>
+</file>
+
+<file path=ppt/slides/slide29.xml><?xml version="1.0" encoding="utf-8"?>
+<p:sld xmlns:a="http://schemas.openxmlformats.org/drawingml/2006/main" xmlns:r="http://schemas.openxmlformats.org/officeDocument/2006/relationships" xmlns:p="http://schemas.openxmlformats.org/presentationml/2006/main">
+  <p:cSld>
+    <p:spTree>
+      <p:nvGrpSpPr>
+        <p:cNvPr id="1" name=""/>
+        <p:cNvGrpSpPr/>
+        <p:nvPr/>
+      </p:nvGrpSpPr>
+      <p:grpSpPr>
+        <a:xfrm>
+          <a:off x="0" y="0"/>
+          <a:ext cx="0" cy="0"/>
+          <a:chOff x="0" y="0"/>
+          <a:chExt cx="0" cy="0"/>
+        </a:xfrm>
+      </p:grpSpPr>
+      <p:sp>
+        <p:nvSpPr>
+          <p:cNvPr id="2" name="Title 1"/>
+          <p:cNvSpPr>
+            <a:spLocks noGrp="1"/>
+          </p:cNvSpPr>
+          <p:nvPr>
+            <p:ph type="title"/>
+          </p:nvPr>
+        </p:nvSpPr>
+        <p:spPr/>
+        <p:txBody>
+          <a:bodyPr/>
+          <a:lstStyle/>
+          <a:p>
+            <a:r>
               <a:t>Day 1 — Close</a:t>
             </a:r>
           </a:p>
@@ -6537,7 +7000,7 @@
           <a:lstStyle/>
           <a:p>
             <a:r>
-              <a:t>Where AI Value Actually Comes From</a:t>
+              <a:t>What This Room Already Wants</a:t>
             </a:r>
           </a:p>
         </p:txBody>
@@ -6558,53 +7021,86 @@
           <a:lstStyle/>
           <a:p>
             <a:r>
-              <a:t> Five, and only five:</a:t>
+              <a:t> You filled these in before we started. Aggregated, no names — this is your use-case list, before the exercise even begins:</a:t>
             </a:r>
           </a:p>
           <a:p>
             <a:r>
               <a:rPr b="1"/>
-              <a:t> Cost</a:t>
-            </a:r>
-            <a:r>
-              <a:t> — the same work, fewer hours</a:t>
+              <a:t> Check a document against the rules</a:t>
+            </a:r>
+            <a:r>
+              <a:t> — submittals vs. requirements, change-request risk, guidance drawn from standards</a:t>
+            </a:r>
+            <a:r>
+              <a:rPr i="1"/>
+              <a:t> (the most-named, by a wide margin)</a:t>
+            </a:r>
+            <a:r>
+              <a:t> —</a:t>
+            </a:r>
+            <a:r>
+              <a:rPr i="1"/>
+              <a:t> your CISO, ISSM, and submittal reviewers</a:t>
             </a:r>
           </a:p>
           <a:p>
             <a:r>
               <a:rPr b="1"/>
-              <a:t> Speed</a:t>
-            </a:r>
-            <a:r>
-              <a:t> — the same work, sooner (often worth more than the cost saving)</a:t>
+              <a:t> Automate repeatable work</a:t>
+            </a:r>
+            <a:r>
+              <a:t> — processes, customer outreach, validation, scheduled tasks —</a:t>
+            </a:r>
+            <a:r>
+              <a:rPr i="1"/>
+              <a:t> cybersecurity and IT managers</a:t>
             </a:r>
           </a:p>
           <a:p>
             <a:r>
               <a:rPr b="1"/>
-              <a:t> Quality</a:t>
-            </a:r>
-            <a:r>
-              <a:t> — fewer errors, more consistency, more thorough review</a:t>
+              <a:t> Find the signal in operational data</a:t>
+            </a:r>
+            <a:r>
+              <a:t> — ticket trends, month-end close, patterns —</a:t>
+            </a:r>
+            <a:r>
+              <a:rPr i="1"/>
+              <a:t> user services, IT PMO</a:t>
             </a:r>
           </a:p>
           <a:p>
             <a:r>
               <a:rPr b="1"/>
-              <a:t> Capacity</a:t>
-            </a:r>
-            <a:r>
-              <a:t> — work that was always worth doing but never got done</a:t>
-            </a:r>
-          </a:p>
-          <a:p>
+              <a:t> Draft faster</a:t>
+            </a:r>
+            <a:r>
+              <a:t> — project and work plans, communications —</a:t>
+            </a:r>
+            <a:r>
+              <a:rPr i="1"/>
+              <a:t> portfolio &amp; project management</a:t>
+            </a:r>
+          </a:p>
+          <a:p>
+            <a:r>
+              <a:t> Underneath all of it, one shared demand:</a:t>
+            </a:r>
             <a:r>
               <a:rPr b="1"/>
-              <a:t> New capability</a:t>
-            </a:r>
-            <a:r>
-              <a:t> — something you genuinely could not do before</a:t>
-            </a:r>
+              <a:t> you want to be able to trust the output</a:t>
+            </a:r>
+            <a:r>
+              <a:t> —</a:t>
+            </a:r>
+            <a:r>
+              <a:rPr i="1"/>
+              <a:t> the whole room.</a:t>
+            </a:r>
+          </a:p>
+          <a:p>
+            <a:endParaRPr i="1"/>
           </a:p>
         </p:txBody>
       </p:sp>
@@ -6682,7 +7178,7 @@
           <a:lstStyle/>
           <a:p>
             <a:r>
-              <a:t>The Category Everyone Underestimates: Capacity</a:t>
+              <a:t>Where We'll Answer This</a:t>
             </a:r>
           </a:p>
         </p:txBody>
@@ -6703,37 +7199,102 @@
           <a:lstStyle/>
           <a:p>
             <a:r>
-              <a:t> Every organization has a backlog of work that is genuinely valuable and never happens because nobody has the hours:</a:t>
-            </a:r>
-          </a:p>
-          <a:p>
-            <a:r>
-              <a:t> Nobody reads all the incident reports looking for patterns</a:t>
-            </a:r>
-          </a:p>
-          <a:p>
-            <a:r>
-              <a:t> Nobody reviews every document for consistency with the current standard</a:t>
-            </a:r>
-          </a:p>
-          <a:p>
-            <a:r>
-              <a:t> Nobody follows up on every piece of feedback</a:t>
-            </a:r>
-          </a:p>
-          <a:p>
-            <a:r>
-              <a:t> Nobody checks whether last year's lessons learned were applied</a:t>
+              <a:t> Every one of those is somewhere in the next two days:</a:t>
             </a:r>
           </a:p>
           <a:p>
             <a:r>
               <a:rPr b="1"/>
-              <a:t> This work has no current cost to eliminate</a:t>
-            </a:r>
-            <a:r>
-              <a:t> — so it never appears in a savings-based business case. It is often where the real value is.</a:t>
-            </a:r>
+              <a:t> Check a document against the rules</a:t>
+            </a:r>
+            <a:r>
+              <a:t> → the</a:t>
+            </a:r>
+            <a:r>
+              <a:rPr i="1"/>
+              <a:t> limits and grounding</a:t>
+            </a:r>
+            <a:r>
+              <a:t> module, then the</a:t>
+            </a:r>
+            <a:r>
+              <a:rPr b="1"/>
+              <a:t> build-your-own-assistant lab</a:t>
+            </a:r>
+            <a:r>
+              <a:t> where you make one do it — and</a:t>
+            </a:r>
+            <a:r>
+              <a:rPr b="1"/>
+              <a:t> Spot the Failure</a:t>
+            </a:r>
+            <a:r>
+              <a:t> , where you check its work</a:t>
+            </a:r>
+          </a:p>
+          <a:p>
+            <a:r>
+              <a:rPr b="1"/>
+              <a:t> Automate repeatable work — including scheduled, unattended runs</a:t>
+            </a:r>
+            <a:r>
+              <a:t> → the</a:t>
+            </a:r>
+            <a:r>
+              <a:rPr b="1"/>
+              <a:t> no-code</a:t>
+            </a:r>
+            <a:r>
+              <a:t> module (Copilot Studio, Power Automate), where we cover what to decide before you let something run on a schedule, and the business case that funds it</a:t>
+            </a:r>
+          </a:p>
+          <a:p>
+            <a:r>
+              <a:rPr b="1"/>
+              <a:t> Find the signal in operational data</a:t>
+            </a:r>
+            <a:r>
+              <a:t> →</a:t>
+            </a:r>
+            <a:r>
+              <a:rPr b="1"/>
+              <a:t> today's prompting workshop</a:t>
+            </a:r>
+            <a:r>
+              <a:t> — inferring themes and trends from a pile of raw feedback</a:t>
+            </a:r>
+          </a:p>
+          <a:p>
+            <a:r>
+              <a:rPr b="1"/>
+              <a:t> Draft faster</a:t>
+            </a:r>
+            <a:r>
+              <a:t> → the prompting workshop again — turning bullets into a full draft</a:t>
+            </a:r>
+          </a:p>
+          <a:p>
+            <a:r>
+              <a:rPr b="1"/>
+              <a:t> Trust the output</a:t>
+            </a:r>
+            <a:r>
+              <a:t> → the</a:t>
+            </a:r>
+            <a:r>
+              <a:rPr i="1"/>
+              <a:t> trust</a:t>
+            </a:r>
+            <a:r>
+              <a:t> module, and the honest answer runs through the whole course:</a:t>
+            </a:r>
+            <a:r>
+              <a:rPr b="1"/>
+              <a:t> you verify, you don't trust</a:t>
+            </a:r>
+          </a:p>
+          <a:p>
+            <a:endParaRPr b="1"/>
           </a:p>
         </p:txBody>
       </p:sp>
@@ -6811,7 +7372,7 @@
           <a:lstStyle/>
           <a:p>
             <a:r>
-              <a:t>The Patterns That Repeat Everywhere</a:t>
+              <a:t>Where AI Value Actually Comes From</a:t>
             </a:r>
           </a:p>
         </p:txBody>
@@ -6832,38 +7393,53 @@
           <a:lstStyle/>
           <a:p>
             <a:r>
-              <a:t> Across every industry, valuable AI use cases take one of these shapes:</a:t>
-            </a:r>
-          </a:p>
-          <a:p>
-            <a:endParaRPr/>
-          </a:p>
-          <a:p>
-            <a:endParaRPr/>
-          </a:p>
-          <a:p>
-            <a:endParaRPr/>
-          </a:p>
-          <a:p>
-            <a:endParaRPr/>
-          </a:p>
-          <a:p>
-            <a:endParaRPr/>
-          </a:p>
-          <a:p>
-            <a:endParaRPr/>
-          </a:p>
-          <a:p>
-            <a:endParaRPr/>
-          </a:p>
-          <a:p>
-            <a:endParaRPr/>
-          </a:p>
-          <a:p>
-            <a:endParaRPr/>
-          </a:p>
-          <a:p>
-            <a:endParaRPr/>
+              <a:t> Five, and only five:</a:t>
+            </a:r>
+          </a:p>
+          <a:p>
+            <a:r>
+              <a:rPr b="1"/>
+              <a:t> Cost</a:t>
+            </a:r>
+            <a:r>
+              <a:t> — the same work, fewer hours</a:t>
+            </a:r>
+          </a:p>
+          <a:p>
+            <a:r>
+              <a:rPr b="1"/>
+              <a:t> Speed</a:t>
+            </a:r>
+            <a:r>
+              <a:t> — the same work, sooner (often worth more than the cost saving)</a:t>
+            </a:r>
+          </a:p>
+          <a:p>
+            <a:r>
+              <a:rPr b="1"/>
+              <a:t> Quality</a:t>
+            </a:r>
+            <a:r>
+              <a:t> — fewer errors, more consistency, more thorough review</a:t>
+            </a:r>
+          </a:p>
+          <a:p>
+            <a:r>
+              <a:rPr b="1"/>
+              <a:t> Capacity</a:t>
+            </a:r>
+            <a:r>
+              <a:t> — work that was always worth doing but never got done</a:t>
+            </a:r>
+          </a:p>
+          <a:p>
+            <a:r>
+              <a:rPr b="1"/>
+              <a:t> New capability</a:t>
+            </a:r>
+            <a:r>
+              <a:t> — something you genuinely could not do before</a:t>
+            </a:r>
           </a:p>
         </p:txBody>
       </p:sp>
@@ -6900,6 +7476,265 @@
           </a:p>
         </p:txBody>
       </p:sp>
+    </p:spTree>
+  </p:cSld>
+  <p:clrMapOvr>
+    <a:masterClrMapping/>
+  </p:clrMapOvr>
+</p:sld>
+</file>
+
+<file path=ppt/slides/slide6.xml><?xml version="1.0" encoding="utf-8"?>
+<p:sld xmlns:a="http://schemas.openxmlformats.org/drawingml/2006/main" xmlns:r="http://schemas.openxmlformats.org/officeDocument/2006/relationships" xmlns:p="http://schemas.openxmlformats.org/presentationml/2006/main">
+  <p:cSld>
+    <p:spTree>
+      <p:nvGrpSpPr>
+        <p:cNvPr id="1" name=""/>
+        <p:cNvGrpSpPr/>
+        <p:nvPr/>
+      </p:nvGrpSpPr>
+      <p:grpSpPr>
+        <a:xfrm>
+          <a:off x="0" y="0"/>
+          <a:ext cx="0" cy="0"/>
+          <a:chOff x="0" y="0"/>
+          <a:chExt cx="0" cy="0"/>
+        </a:xfrm>
+      </p:grpSpPr>
+      <p:sp>
+        <p:nvSpPr>
+          <p:cNvPr id="2" name="Title 1"/>
+          <p:cNvSpPr>
+            <a:spLocks noGrp="1"/>
+          </p:cNvSpPr>
+          <p:nvPr>
+            <p:ph type="title"/>
+          </p:nvPr>
+        </p:nvSpPr>
+        <p:spPr/>
+        <p:txBody>
+          <a:bodyPr/>
+          <a:lstStyle/>
+          <a:p>
+            <a:r>
+              <a:t>The Category Everyone Underestimates: Capacity</a:t>
+            </a:r>
+          </a:p>
+        </p:txBody>
+      </p:sp>
+      <p:sp>
+        <p:nvSpPr>
+          <p:cNvPr id="3" name="Content Placeholder 2"/>
+          <p:cNvSpPr>
+            <a:spLocks noGrp="1"/>
+          </p:cNvSpPr>
+          <p:nvPr>
+            <p:ph idx="1"/>
+          </p:nvPr>
+        </p:nvSpPr>
+        <p:spPr/>
+        <p:txBody>
+          <a:bodyPr/>
+          <a:lstStyle/>
+          <a:p>
+            <a:r>
+              <a:t> Every organization has a backlog of work that is genuinely valuable and never happens because nobody has the hours:</a:t>
+            </a:r>
+          </a:p>
+          <a:p>
+            <a:r>
+              <a:t> Nobody reads all the incident reports looking for patterns</a:t>
+            </a:r>
+          </a:p>
+          <a:p>
+            <a:r>
+              <a:t> Nobody reviews every document for consistency with the current standard</a:t>
+            </a:r>
+          </a:p>
+          <a:p>
+            <a:r>
+              <a:t> Nobody follows up on every piece of feedback</a:t>
+            </a:r>
+          </a:p>
+          <a:p>
+            <a:r>
+              <a:t> Nobody checks whether last year's lessons learned were applied</a:t>
+            </a:r>
+          </a:p>
+          <a:p>
+            <a:r>
+              <a:rPr b="1"/>
+              <a:t> This work has no current cost to eliminate</a:t>
+            </a:r>
+            <a:r>
+              <a:t> — so it never appears in a savings-based business case. It is often where the real value is.</a:t>
+            </a:r>
+          </a:p>
+        </p:txBody>
+      </p:sp>
+      <p:sp>
+        <p:nvSpPr>
+          <p:cNvPr id="4" name="TextBox 3"/>
+          <p:cNvSpPr txBox="1"/>
+          <p:nvPr/>
+        </p:nvSpPr>
+        <p:spPr>
+          <a:xfrm>
+            <a:off x="704088" y="8065008"/>
+            <a:ext cx="8915400" cy="228600"/>
+          </a:xfrm>
+          <a:prstGeom prst="rect">
+            <a:avLst/>
+          </a:prstGeom>
+          <a:noFill/>
+        </p:spPr>
+        <p:txBody>
+          <a:bodyPr wrap="none">
+            <a:spAutoFit/>
+          </a:bodyPr>
+          <a:lstStyle/>
+          <a:p>
+            <a:r>
+              <a:rPr sz="800">
+                <a:solidFill>
+                  <a:srgbClr val="000000"/>
+                </a:solidFill>
+              </a:rPr>
+              <a:t>Copyright © 2026 by Elephant Scale, All Rights Reserved</a:t>
+            </a:r>
+          </a:p>
+        </p:txBody>
+      </p:sp>
+    </p:spTree>
+  </p:cSld>
+  <p:clrMapOvr>
+    <a:masterClrMapping/>
+  </p:clrMapOvr>
+</p:sld>
+</file>
+
+<file path=ppt/slides/slide7.xml><?xml version="1.0" encoding="utf-8"?>
+<p:sld xmlns:a="http://schemas.openxmlformats.org/drawingml/2006/main" xmlns:r="http://schemas.openxmlformats.org/officeDocument/2006/relationships" xmlns:p="http://schemas.openxmlformats.org/presentationml/2006/main">
+  <p:cSld>
+    <p:spTree>
+      <p:nvGrpSpPr>
+        <p:cNvPr id="1" name=""/>
+        <p:cNvGrpSpPr/>
+        <p:nvPr/>
+      </p:nvGrpSpPr>
+      <p:grpSpPr>
+        <a:xfrm>
+          <a:off x="0" y="0"/>
+          <a:ext cx="0" cy="0"/>
+          <a:chOff x="0" y="0"/>
+          <a:chExt cx="0" cy="0"/>
+        </a:xfrm>
+      </p:grpSpPr>
+      <p:sp>
+        <p:nvSpPr>
+          <p:cNvPr id="2" name="Title 1"/>
+          <p:cNvSpPr>
+            <a:spLocks noGrp="1"/>
+          </p:cNvSpPr>
+          <p:nvPr>
+            <p:ph type="title"/>
+          </p:nvPr>
+        </p:nvSpPr>
+        <p:spPr/>
+        <p:txBody>
+          <a:bodyPr/>
+          <a:lstStyle/>
+          <a:p>
+            <a:r>
+              <a:t>The Patterns That Repeat Everywhere</a:t>
+            </a:r>
+          </a:p>
+        </p:txBody>
+      </p:sp>
+      <p:sp>
+        <p:nvSpPr>
+          <p:cNvPr id="3" name="Content Placeholder 2"/>
+          <p:cNvSpPr>
+            <a:spLocks noGrp="1"/>
+          </p:cNvSpPr>
+          <p:nvPr>
+            <p:ph idx="1"/>
+          </p:nvPr>
+        </p:nvSpPr>
+        <p:spPr/>
+        <p:txBody>
+          <a:bodyPr/>
+          <a:lstStyle/>
+          <a:p>
+            <a:r>
+              <a:t> Across every industry, valuable AI use cases take one of these shapes:</a:t>
+            </a:r>
+          </a:p>
+          <a:p>
+            <a:endParaRPr/>
+          </a:p>
+          <a:p>
+            <a:endParaRPr/>
+          </a:p>
+          <a:p>
+            <a:endParaRPr/>
+          </a:p>
+          <a:p>
+            <a:endParaRPr/>
+          </a:p>
+          <a:p>
+            <a:endParaRPr/>
+          </a:p>
+          <a:p>
+            <a:endParaRPr/>
+          </a:p>
+          <a:p>
+            <a:endParaRPr/>
+          </a:p>
+          <a:p>
+            <a:endParaRPr/>
+          </a:p>
+          <a:p>
+            <a:endParaRPr/>
+          </a:p>
+          <a:p>
+            <a:endParaRPr/>
+          </a:p>
+        </p:txBody>
+      </p:sp>
+      <p:sp>
+        <p:nvSpPr>
+          <p:cNvPr id="4" name="TextBox 3"/>
+          <p:cNvSpPr txBox="1"/>
+          <p:nvPr/>
+        </p:nvSpPr>
+        <p:spPr>
+          <a:xfrm>
+            <a:off x="704088" y="8065008"/>
+            <a:ext cx="8915400" cy="228600"/>
+          </a:xfrm>
+          <a:prstGeom prst="rect">
+            <a:avLst/>
+          </a:prstGeom>
+          <a:noFill/>
+        </p:spPr>
+        <p:txBody>
+          <a:bodyPr wrap="none">
+            <a:spAutoFit/>
+          </a:bodyPr>
+          <a:lstStyle/>
+          <a:p>
+            <a:r>
+              <a:rPr sz="800">
+                <a:solidFill>
+                  <a:srgbClr val="000000"/>
+                </a:solidFill>
+              </a:rPr>
+              <a:t>Copyright © 2026 by Elephant Scale, All Rights Reserved</a:t>
+            </a:r>
+          </a:p>
+        </p:txBody>
+      </p:sp>
       <p:graphicFrame>
         <p:nvGraphicFramePr>
           <p:cNvPr id="5" name="Table 4"/>
@@ -6909,7 +7744,7 @@
           <p:nvPr>
             <p:extLst>
               <p:ext uri="{D42A27DB-BD31-4B8C-83A1-F6EECF244321}">
-                <p14:modId xmlns:p14="http://schemas.microsoft.com/office/powerpoint/2010/main" val="4151304617"/>
+                <p14:modId xmlns:p14="http://schemas.microsoft.com/office/powerpoint/2010/main" val="548434237"/>
               </p:ext>
             </p:extLst>
           </p:nvPr>
@@ -7240,7 +8075,7 @@
 </p:sld>
 </file>
 
-<file path=ppt/slides/slide6.xml><?xml version="1.0" encoding="utf-8"?>
+<file path=ppt/slides/slide8.xml><?xml version="1.0" encoding="utf-8"?>
 <p:sld xmlns:a="http://schemas.openxmlformats.org/drawingml/2006/main" xmlns:r="http://schemas.openxmlformats.org/officeDocument/2006/relationships" xmlns:p="http://schemas.openxmlformats.org/presentationml/2006/main">
   <p:cSld>
     <p:spTree>
@@ -7367,7 +8202,7 @@
 </p:sld>
 </file>
 
-<file path=ppt/slides/slide7.xml><?xml version="1.0" encoding="utf-8"?>
+<file path=ppt/slides/slide9.xml><?xml version="1.0" encoding="utf-8"?>
 <p:sld xmlns:a="http://schemas.openxmlformats.org/drawingml/2006/main" xmlns:r="http://schemas.openxmlformats.org/officeDocument/2006/relationships" xmlns:p="http://schemas.openxmlformats.org/presentationml/2006/main">
   <p:cSld>
     <p:spTree>
@@ -7499,7 +8334,7 @@
         </p:nvSpPr>
         <p:spPr>
           <a:xfrm>
-            <a:off x="704088" y="5303520"/>
+            <a:off x="685038" y="6599699"/>
             <a:ext cx="7507224" cy="877824"/>
           </a:xfrm>
           <a:prstGeom prst="rect">
@@ -7540,308 +8375,6 @@
                 </a:solidFill>
               </a:rPr>
               <a:t>These are your quick wins. Look here first when you need a proof point.</a:t>
-            </a:r>
-          </a:p>
-        </p:txBody>
-      </p:sp>
-    </p:spTree>
-  </p:cSld>
-  <p:clrMapOvr>
-    <a:masterClrMapping/>
-  </p:clrMapOvr>
-</p:sld>
-</file>
-
-<file path=ppt/slides/slide8.xml><?xml version="1.0" encoding="utf-8"?>
-<p:sld xmlns:a="http://schemas.openxmlformats.org/drawingml/2006/main" xmlns:r="http://schemas.openxmlformats.org/officeDocument/2006/relationships" xmlns:p="http://schemas.openxmlformats.org/presentationml/2006/main">
-  <p:cSld>
-    <p:spTree>
-      <p:nvGrpSpPr>
-        <p:cNvPr id="1" name=""/>
-        <p:cNvGrpSpPr/>
-        <p:nvPr/>
-      </p:nvGrpSpPr>
-      <p:grpSpPr>
-        <a:xfrm>
-          <a:off x="0" y="0"/>
-          <a:ext cx="0" cy="0"/>
-          <a:chOff x="0" y="0"/>
-          <a:chExt cx="0" cy="0"/>
-        </a:xfrm>
-      </p:grpSpPr>
-      <p:sp>
-        <p:nvSpPr>
-          <p:cNvPr id="2" name="Title 1"/>
-          <p:cNvSpPr>
-            <a:spLocks noGrp="1"/>
-          </p:cNvSpPr>
-          <p:nvPr>
-            <p:ph type="title"/>
-          </p:nvPr>
-        </p:nvSpPr>
-        <p:spPr/>
-        <p:txBody>
-          <a:bodyPr/>
-          <a:lstStyle/>
-          <a:p>
-            <a:r>
-              <a:t>Quality and Consistency Review</a:t>
-            </a:r>
-          </a:p>
-        </p:txBody>
-      </p:sp>
-      <p:sp>
-        <p:nvSpPr>
-          <p:cNvPr id="3" name="Content Placeholder 2"/>
-          <p:cNvSpPr>
-            <a:spLocks noGrp="1"/>
-          </p:cNvSpPr>
-          <p:nvPr>
-            <p:ph idx="1"/>
-          </p:nvPr>
-        </p:nvSpPr>
-        <p:spPr/>
-        <p:txBody>
-          <a:bodyPr/>
-          <a:lstStyle/>
-          <a:p>
-            <a:r>
-              <a:rPr i="1"/>
-              <a:t> "Check this document against that standard and tell me every place it deviates."</a:t>
-            </a:r>
-          </a:p>
-          <a:p>
-            <a:r>
-              <a:t> A submission against a template or checklist</a:t>
-            </a:r>
-          </a:p>
-          <a:p>
-            <a:r>
-              <a:t> This revision against the previous one — what actually changed and does it matter</a:t>
-            </a:r>
-          </a:p>
-          <a:p>
-            <a:r>
-              <a:t> A set of procedures against each other — where do they contradict?</a:t>
-            </a:r>
-          </a:p>
-          <a:p>
-            <a:r>
-              <a:t> A report against the data it cites</a:t>
-            </a:r>
-          </a:p>
-          <a:p>
-            <a:r>
-              <a:rPr b="1"/>
-              <a:t> The framing that makes this safe:</a:t>
-            </a:r>
-            <a:r>
-              <a:t> AI does not approve anything. AI produces a</a:t>
-            </a:r>
-            <a:r>
-              <a:rPr b="1"/>
-              <a:t> list of things for a qualified person to look at.</a:t>
-            </a:r>
-            <a:r>
-              <a:t> It changes where the human's attention goes; it does not replace the human.</a:t>
-            </a:r>
-          </a:p>
-        </p:txBody>
-      </p:sp>
-      <p:sp>
-        <p:nvSpPr>
-          <p:cNvPr id="4" name="TextBox 3"/>
-          <p:cNvSpPr txBox="1"/>
-          <p:nvPr/>
-        </p:nvSpPr>
-        <p:spPr>
-          <a:xfrm>
-            <a:off x="704088" y="8065008"/>
-            <a:ext cx="8915400" cy="228600"/>
-          </a:xfrm>
-          <a:prstGeom prst="rect">
-            <a:avLst/>
-          </a:prstGeom>
-          <a:noFill/>
-        </p:spPr>
-        <p:txBody>
-          <a:bodyPr wrap="none">
-            <a:spAutoFit/>
-          </a:bodyPr>
-          <a:lstStyle/>
-          <a:p>
-            <a:r>
-              <a:rPr sz="800">
-                <a:solidFill>
-                  <a:srgbClr val="000000"/>
-                </a:solidFill>
-              </a:rPr>
-              <a:t>Copyright © 2026 by Elephant Scale, All Rights Reserved</a:t>
-            </a:r>
-          </a:p>
-        </p:txBody>
-      </p:sp>
-    </p:spTree>
-  </p:cSld>
-  <p:clrMapOvr>
-    <a:masterClrMapping/>
-  </p:clrMapOvr>
-</p:sld>
-</file>
-
-<file path=ppt/slides/slide9.xml><?xml version="1.0" encoding="utf-8"?>
-<p:sld xmlns:a="http://schemas.openxmlformats.org/drawingml/2006/main" xmlns:r="http://schemas.openxmlformats.org/officeDocument/2006/relationships" xmlns:p="http://schemas.openxmlformats.org/presentationml/2006/main">
-  <p:cSld>
-    <p:spTree>
-      <p:nvGrpSpPr>
-        <p:cNvPr id="1" name=""/>
-        <p:cNvGrpSpPr/>
-        <p:nvPr/>
-      </p:nvGrpSpPr>
-      <p:grpSpPr>
-        <a:xfrm>
-          <a:off x="0" y="0"/>
-          <a:ext cx="0" cy="0"/>
-          <a:chOff x="0" y="0"/>
-          <a:chExt cx="0" cy="0"/>
-        </a:xfrm>
-      </p:grpSpPr>
-      <p:sp>
-        <p:nvSpPr>
-          <p:cNvPr id="2" name="Title 1"/>
-          <p:cNvSpPr>
-            <a:spLocks noGrp="1"/>
-          </p:cNvSpPr>
-          <p:nvPr>
-            <p:ph type="title"/>
-          </p:nvPr>
-        </p:nvSpPr>
-        <p:spPr/>
-        <p:txBody>
-          <a:bodyPr/>
-          <a:lstStyle/>
-          <a:p>
-            <a:r>
-              <a:t>Use Cases in Regulated and Safety-Critical Environments</a:t>
-            </a:r>
-          </a:p>
-        </p:txBody>
-      </p:sp>
-      <p:sp>
-        <p:nvSpPr>
-          <p:cNvPr id="3" name="Content Placeholder 2"/>
-          <p:cNvSpPr>
-            <a:spLocks noGrp="1"/>
-          </p:cNvSpPr>
-          <p:nvPr>
-            <p:ph idx="1"/>
-          </p:nvPr>
-        </p:nvSpPr>
-        <p:spPr/>
-        <p:txBody>
-          <a:bodyPr/>
-          <a:lstStyle/>
-          <a:p>
-            <a:r>
-              <a:rPr b="1"/>
-              <a:t> What doesn't change:</a:t>
-            </a:r>
-            <a:r>
-              <a:t> the technology, the patterns, the prompting, the economics.</a:t>
-            </a:r>
-          </a:p>
-          <a:p>
-            <a:r>
-              <a:rPr b="1"/>
-              <a:t> What does change:</a:t>
-            </a:r>
-          </a:p>
-          <a:p>
-            <a:r>
-              <a:t> The</a:t>
-            </a:r>
-            <a:r>
-              <a:rPr b="1"/>
-              <a:t> evidence burden</a:t>
-            </a:r>
-            <a:r>
-              <a:t> — you must be able to show how a result was produced</a:t>
-            </a:r>
-          </a:p>
-          <a:p>
-            <a:r>
-              <a:rPr b="1"/>
-              <a:t> Data boundaries</a:t>
-            </a:r>
-            <a:r>
-              <a:t> — what may go where is decided before the use case is</a:t>
-            </a:r>
-          </a:p>
-          <a:p>
-            <a:r>
-              <a:rPr b="1"/>
-              <a:t> Approval paths</a:t>
-            </a:r>
-            <a:r>
-              <a:t> — proportional to consequence, and already defined</a:t>
-            </a:r>
-          </a:p>
-          <a:p>
-            <a:r>
-              <a:rPr b="1"/>
-              <a:t> The irreversible zone</a:t>
-            </a:r>
-            <a:r>
-              <a:t> — some outputs simply do not get generated by a machine</a:t>
-            </a:r>
-          </a:p>
-          <a:p>
-            <a:r>
-              <a:rPr b="1"/>
-              <a:t> The practical consequence:</a:t>
-            </a:r>
-            <a:r>
-              <a:t> start where the work is</a:t>
-            </a:r>
-            <a:r>
-              <a:rPr i="1"/>
-              <a:t> high-volume, internal, and</a:t>
-            </a:r>
-            <a:r>
-              <a:t> . Build the track record there. Do not open with the hardest case.</a:t>
-            </a:r>
-          </a:p>
-        </p:txBody>
-      </p:sp>
-      <p:sp>
-        <p:nvSpPr>
-          <p:cNvPr id="4" name="TextBox 3"/>
-          <p:cNvSpPr txBox="1"/>
-          <p:nvPr/>
-        </p:nvSpPr>
-        <p:spPr>
-          <a:xfrm>
-            <a:off x="704088" y="8065008"/>
-            <a:ext cx="8915400" cy="228600"/>
-          </a:xfrm>
-          <a:prstGeom prst="rect">
-            <a:avLst/>
-          </a:prstGeom>
-          <a:noFill/>
-        </p:spPr>
-        <p:txBody>
-          <a:bodyPr wrap="none">
-            <a:spAutoFit/>
-          </a:bodyPr>
-          <a:lstStyle/>
-          <a:p>
-            <a:r>
-              <a:rPr sz="800">
-                <a:solidFill>
-                  <a:srgbClr val="000000"/>
-                </a:solidFill>
-              </a:rPr>
-              <a:t>Copyright © 2026 by Elephant Scale, All Rights Reserved</a:t>
             </a:r>
           </a:p>
         </p:txBody>
